--- a/Plantillas_pptx/IPN_Colaboradores_Oficina Presidencia_automatizada.pptx
+++ b/Plantillas_pptx/IPN_Colaboradores_Oficina Presidencia_automatizada.pptx
@@ -792,28 +792,34 @@
                 <c:formatCode>0.0%</c:formatCode>
                 <c:ptCount val="10"/>
                 <c:pt idx="0">
-                  <c:v>6.3E-2</c:v>
+                  <c:v>0.33329999999999999</c:v>
                 </c:pt>
                 <c:pt idx="1">
-                  <c:v>6.3E-2</c:v>
+                  <c:v>0.33329999999999999</c:v>
                 </c:pt>
                 <c:pt idx="2">
-                  <c:v>4.8000000000000001E-2</c:v>
+                  <c:v>0.33329999999999999</c:v>
                 </c:pt>
                 <c:pt idx="3">
-                  <c:v>8.5999999999999993E-2</c:v>
+                  <c:v>0.33329999999999999</c:v>
                 </c:pt>
                 <c:pt idx="4">
-                  <c:v>7.0000000000000007E-2</c:v>
+                  <c:v>0.33329999999999999</c:v>
                 </c:pt>
                 <c:pt idx="5">
-                  <c:v>3.3000000000000002E-2</c:v>
+                  <c:v>0.33329999999999999</c:v>
                 </c:pt>
                 <c:pt idx="6">
-                  <c:v>9.8000000000000004E-2</c:v>
+                  <c:v>0.33329999999999999</c:v>
                 </c:pt>
                 <c:pt idx="7">
-                  <c:v>5.8999999999999997E-2</c:v>
+                  <c:v>0.33329999999999999</c:v>
+                </c:pt>
+                <c:pt idx="8">
+                  <c:v>0.33329999999999999</c:v>
+                </c:pt>
+                <c:pt idx="9">
+                  <c:v>0.33329999999999999</c:v>
                 </c:pt>
               </c:numCache>
             </c:numRef>
@@ -1235,31 +1241,34 @@
                 <c:formatCode>0.0%</c:formatCode>
                 <c:ptCount val="10"/>
                 <c:pt idx="0">
-                  <c:v>0.17199999999999999</c:v>
+                  <c:v>0.33329999999999999</c:v>
                 </c:pt>
                 <c:pt idx="1">
-                  <c:v>0.159</c:v>
+                  <c:v>0.33329999999999999</c:v>
                 </c:pt>
                 <c:pt idx="2">
-                  <c:v>0.215</c:v>
+                  <c:v>0.33329999999999999</c:v>
                 </c:pt>
                 <c:pt idx="3">
-                  <c:v>0.23400000000000001</c:v>
+                  <c:v>0.33329999999999999</c:v>
                 </c:pt>
                 <c:pt idx="4">
-                  <c:v>0.21199999999999999</c:v>
+                  <c:v>0.33329999999999999</c:v>
                 </c:pt>
                 <c:pt idx="5">
-                  <c:v>0.17199999999999999</c:v>
+                  <c:v>0.33329999999999999</c:v>
                 </c:pt>
                 <c:pt idx="6">
-                  <c:v>0.29899999999999999</c:v>
+                  <c:v>0.33329999999999999</c:v>
                 </c:pt>
                 <c:pt idx="7">
-                  <c:v>0.21099999999999999</c:v>
+                  <c:v>0.33329999999999999</c:v>
                 </c:pt>
                 <c:pt idx="8">
-                  <c:v>0.26700000000000002</c:v>
+                  <c:v>0.33329999999999999</c:v>
+                </c:pt>
+                <c:pt idx="9">
+                  <c:v>0.33329999999999999</c:v>
                 </c:pt>
               </c:numCache>
             </c:numRef>
@@ -1569,34 +1578,34 @@
                 <c:formatCode>0.0%</c:formatCode>
                 <c:ptCount val="10"/>
                 <c:pt idx="0">
-                  <c:v>0.76500000000000001</c:v>
+                  <c:v>0.33329999999999999</c:v>
                 </c:pt>
                 <c:pt idx="1">
-                  <c:v>0.77800000000000002</c:v>
+                  <c:v>0.33329999999999999</c:v>
                 </c:pt>
                 <c:pt idx="2">
-                  <c:v>0.73599999999999999</c:v>
+                  <c:v>0.33329999999999999</c:v>
                 </c:pt>
                 <c:pt idx="3">
-                  <c:v>0.68</c:v>
+                  <c:v>0.33329999999999999</c:v>
                 </c:pt>
                 <c:pt idx="4">
-                  <c:v>0.71799999999999997</c:v>
+                  <c:v>0.33329999999999999</c:v>
                 </c:pt>
                 <c:pt idx="5">
-                  <c:v>0.79600000000000004</c:v>
+                  <c:v>0.33329999999999999</c:v>
                 </c:pt>
                 <c:pt idx="6">
-                  <c:v>0.60199999999999998</c:v>
+                  <c:v>0.33329999999999999</c:v>
                 </c:pt>
                 <c:pt idx="7">
-                  <c:v>0.73</c:v>
+                  <c:v>0.33329999999999999</c:v>
                 </c:pt>
                 <c:pt idx="8">
-                  <c:v>0.73299999999999998</c:v>
+                  <c:v>0.33329999999999999</c:v>
                 </c:pt>
                 <c:pt idx="9">
-                  <c:v>1</c:v>
+                  <c:v>0.33329999999999999</c:v>
                 </c:pt>
               </c:numCache>
             </c:numRef>
@@ -2084,8 +2093,32 @@
             <c:numRef>
               <c:f>Hoja1!$B$2:$B$9</c:f>
               <c:numCache>
-                <c:formatCode>General</c:formatCode>
+                <c:formatCode>0.0%</c:formatCode>
                 <c:ptCount val="8"/>
+                <c:pt idx="0">
+                  <c:v>0.33329999999999999</c:v>
+                </c:pt>
+                <c:pt idx="1">
+                  <c:v>0.33329999999999999</c:v>
+                </c:pt>
+                <c:pt idx="2">
+                  <c:v>0.33329999999999999</c:v>
+                </c:pt>
+                <c:pt idx="3">
+                  <c:v>0.33329999999999999</c:v>
+                </c:pt>
+                <c:pt idx="4">
+                  <c:v>0.33329999999999999</c:v>
+                </c:pt>
+                <c:pt idx="5">
+                  <c:v>0.33329999999999999</c:v>
+                </c:pt>
+                <c:pt idx="6">
+                  <c:v>0.33329999999999999</c:v>
+                </c:pt>
+                <c:pt idx="7">
+                  <c:v>0.33329999999999999</c:v>
+                </c:pt>
               </c:numCache>
             </c:numRef>
           </c:val>
@@ -2213,8 +2246,32 @@
             <c:numRef>
               <c:f>Hoja1!$C$2:$C$9</c:f>
               <c:numCache>
-                <c:formatCode>General</c:formatCode>
+                <c:formatCode>0.0%</c:formatCode>
                 <c:ptCount val="8"/>
+                <c:pt idx="0">
+                  <c:v>0.33329999999999999</c:v>
+                </c:pt>
+                <c:pt idx="1">
+                  <c:v>0.33329999999999999</c:v>
+                </c:pt>
+                <c:pt idx="2">
+                  <c:v>0.33329999999999999</c:v>
+                </c:pt>
+                <c:pt idx="3">
+                  <c:v>0.33329999999999999</c:v>
+                </c:pt>
+                <c:pt idx="4">
+                  <c:v>0.33329999999999999</c:v>
+                </c:pt>
+                <c:pt idx="5">
+                  <c:v>0.33329999999999999</c:v>
+                </c:pt>
+                <c:pt idx="6">
+                  <c:v>0.33329999999999999</c:v>
+                </c:pt>
+                <c:pt idx="7">
+                  <c:v>0.33329999999999999</c:v>
+                </c:pt>
               </c:numCache>
             </c:numRef>
           </c:val>
@@ -2514,28 +2571,28 @@
                 <c:formatCode>0.0%</c:formatCode>
                 <c:ptCount val="8"/>
                 <c:pt idx="0">
-                  <c:v>1</c:v>
+                  <c:v>0.33329999999999999</c:v>
                 </c:pt>
                 <c:pt idx="1">
-                  <c:v>1</c:v>
+                  <c:v>0.33329999999999999</c:v>
                 </c:pt>
                 <c:pt idx="2">
-                  <c:v>1</c:v>
+                  <c:v>0.33329999999999999</c:v>
                 </c:pt>
                 <c:pt idx="3">
-                  <c:v>1</c:v>
+                  <c:v>0.33329999999999999</c:v>
                 </c:pt>
                 <c:pt idx="4">
-                  <c:v>1</c:v>
+                  <c:v>0.33329999999999999</c:v>
                 </c:pt>
                 <c:pt idx="5">
-                  <c:v>1</c:v>
+                  <c:v>0.33329999999999999</c:v>
                 </c:pt>
                 <c:pt idx="6">
-                  <c:v>1</c:v>
+                  <c:v>0.33329999999999999</c:v>
                 </c:pt>
                 <c:pt idx="7">
-                  <c:v>1</c:v>
+                  <c:v>0.33329999999999999</c:v>
                 </c:pt>
               </c:numCache>
             </c:numRef>
@@ -3891,7 +3948,7 @@
               <a:pPr>
                 <a:defRPr/>
               </a:pPr>
-              <a:t>21/07/2026</a:t>
+              <a:t>05/10/2026</a:t>
             </a:fld>
             <a:endParaRPr lang="es-ES_tradnl"/>
           </a:p>
@@ -5710,7 +5767,7 @@
               <a:pPr>
                 <a:defRPr/>
               </a:pPr>
-              <a:t>21/07/2026</a:t>
+              <a:t>05/10/2026</a:t>
             </a:fld>
             <a:endParaRPr lang="es-ES"/>
           </a:p>
@@ -6037,7 +6094,7 @@
               <a:pPr>
                 <a:defRPr/>
               </a:pPr>
-              <a:t>21/07/2026</a:t>
+              <a:t>05/10/2026</a:t>
             </a:fld>
             <a:endParaRPr lang="es-ES"/>
           </a:p>
@@ -6278,7 +6335,7 @@
               <a:pPr>
                 <a:defRPr/>
               </a:pPr>
-              <a:t>21/07/2026</a:t>
+              <a:t>05/10/2026</a:t>
             </a:fld>
             <a:endParaRPr lang="es-ES"/>
           </a:p>
@@ -6529,7 +6586,7 @@
               <a:pPr>
                 <a:defRPr/>
               </a:pPr>
-              <a:t>21/07/2026</a:t>
+              <a:t>05/10/2026</a:t>
             </a:fld>
             <a:endParaRPr lang="es-ES"/>
           </a:p>
@@ -7044,7 +7101,7 @@
               <a:pPr>
                 <a:defRPr/>
               </a:pPr>
-              <a:t>21/07/2026</a:t>
+              <a:t>05/10/2026</a:t>
             </a:fld>
             <a:endParaRPr lang="es-MX"/>
           </a:p>
@@ -7246,7 +7303,7 @@
               <a:pPr>
                 <a:defRPr/>
               </a:pPr>
-              <a:t>21/07/2026</a:t>
+              <a:t>05/10/2026</a:t>
             </a:fld>
             <a:endParaRPr lang="es-MX"/>
           </a:p>
@@ -7524,7 +7581,7 @@
               <a:pPr>
                 <a:defRPr/>
               </a:pPr>
-              <a:t>21/07/2026</a:t>
+              <a:t>05/10/2026</a:t>
             </a:fld>
             <a:endParaRPr lang="es-MX"/>
           </a:p>
@@ -7929,7 +7986,7 @@
               <a:pPr>
                 <a:defRPr/>
               </a:pPr>
-              <a:t>21/07/2026</a:t>
+              <a:t>05/10/2026</a:t>
             </a:fld>
             <a:endParaRPr lang="es-MX"/>
           </a:p>
@@ -8617,7 +8674,7 @@
               <a:pPr>
                 <a:defRPr/>
               </a:pPr>
-              <a:t>21/07/2026</a:t>
+              <a:t>05/10/2026</a:t>
             </a:fld>
             <a:endParaRPr lang="es-MX"/>
           </a:p>
@@ -8767,7 +8824,7 @@
               <a:pPr>
                 <a:defRPr/>
               </a:pPr>
-              <a:t>21/07/2026</a:t>
+              <a:t>05/10/2026</a:t>
             </a:fld>
             <a:endParaRPr lang="es-MX"/>
           </a:p>
@@ -8969,7 +9026,7 @@
               <a:pPr>
                 <a:defRPr/>
               </a:pPr>
-              <a:t>21/07/2026</a:t>
+              <a:t>05/10/2026</a:t>
             </a:fld>
             <a:endParaRPr lang="es-ES"/>
           </a:p>
@@ -9483,7 +9540,7 @@
               <a:pPr>
                 <a:defRPr/>
               </a:pPr>
-              <a:t>21/07/2026</a:t>
+              <a:t>05/10/2026</a:t>
             </a:fld>
             <a:endParaRPr lang="es-MX"/>
           </a:p>
@@ -9775,7 +9832,7 @@
               <a:pPr>
                 <a:defRPr/>
               </a:pPr>
-              <a:t>21/07/2026</a:t>
+              <a:t>05/10/2026</a:t>
             </a:fld>
             <a:endParaRPr lang="es-MX"/>
           </a:p>
@@ -9982,7 +10039,7 @@
               <a:pPr>
                 <a:defRPr/>
               </a:pPr>
-              <a:t>21/07/2026</a:t>
+              <a:t>05/10/2026</a:t>
             </a:fld>
             <a:endParaRPr lang="es-MX"/>
           </a:p>
@@ -10194,7 +10251,7 @@
               <a:pPr>
                 <a:defRPr/>
               </a:pPr>
-              <a:t>21/07/2026</a:t>
+              <a:t>05/10/2026</a:t>
             </a:fld>
             <a:endParaRPr lang="es-MX"/>
           </a:p>
@@ -10498,7 +10555,7 @@
               <a:pPr>
                 <a:defRPr/>
               </a:pPr>
-              <a:t>21/07/2026</a:t>
+              <a:t>05/10/2026</a:t>
             </a:fld>
             <a:endParaRPr lang="es-ES"/>
           </a:p>
@@ -10739,7 +10796,7 @@
               <a:pPr>
                 <a:defRPr/>
               </a:pPr>
-              <a:t>21/07/2026</a:t>
+              <a:t>05/10/2026</a:t>
             </a:fld>
             <a:endParaRPr lang="es-ES"/>
           </a:p>
@@ -11056,7 +11113,7 @@
               <a:pPr>
                 <a:defRPr/>
               </a:pPr>
-              <a:t>21/07/2026</a:t>
+              <a:t>05/10/2026</a:t>
             </a:fld>
             <a:endParaRPr lang="es-ES"/>
           </a:p>
@@ -11415,7 +11472,7 @@
               <a:pPr>
                 <a:defRPr/>
               </a:pPr>
-              <a:t>21/07/2026</a:t>
+              <a:t>05/10/2026</a:t>
             </a:fld>
             <a:endParaRPr lang="es-ES"/>
           </a:p>
@@ -11732,7 +11789,7 @@
               <a:pPr>
                 <a:defRPr/>
               </a:pPr>
-              <a:t>21/07/2026</a:t>
+              <a:t>05/10/2026</a:t>
             </a:fld>
             <a:endParaRPr lang="es-ES"/>
           </a:p>
@@ -12225,7 +12282,7 @@
               <a:pPr>
                 <a:defRPr/>
               </a:pPr>
-              <a:t>21/07/2026</a:t>
+              <a:t>05/10/2026</a:t>
             </a:fld>
             <a:endParaRPr lang="es-ES"/>
           </a:p>
@@ -12414,7 +12471,7 @@
               <a:pPr>
                 <a:defRPr/>
               </a:pPr>
-              <a:t>21/07/2026</a:t>
+              <a:t>05/10/2026</a:t>
             </a:fld>
             <a:endParaRPr lang="es-ES"/>
           </a:p>
@@ -12580,7 +12637,7 @@
               <a:pPr>
                 <a:defRPr/>
               </a:pPr>
-              <a:t>21/07/2026</a:t>
+              <a:t>05/10/2026</a:t>
             </a:fld>
             <a:endParaRPr lang="es-ES"/>
           </a:p>
@@ -12870,7 +12927,7 @@
               <a:pPr>
                 <a:defRPr/>
               </a:pPr>
-              <a:t>21/07/2026</a:t>
+              <a:t>05/10/2026</a:t>
             </a:fld>
             <a:endParaRPr lang="es-ES"/>
           </a:p>
@@ -13218,7 +13275,7 @@
               <a:pPr>
                 <a:defRPr/>
               </a:pPr>
-              <a:t>21/07/2026</a:t>
+              <a:t>05/10/2026</a:t>
             </a:fld>
             <a:endParaRPr lang="es-ES"/>
           </a:p>
@@ -13545,7 +13602,7 @@
               <a:pPr>
                 <a:defRPr/>
               </a:pPr>
-              <a:t>21/07/2026</a:t>
+              <a:t>05/10/2026</a:t>
             </a:fld>
             <a:endParaRPr lang="es-ES"/>
           </a:p>
@@ -13786,7 +13843,7 @@
               <a:pPr>
                 <a:defRPr/>
               </a:pPr>
-              <a:t>21/07/2026</a:t>
+              <a:t>05/10/2026</a:t>
             </a:fld>
             <a:endParaRPr lang="es-ES"/>
           </a:p>
@@ -14037,7 +14094,7 @@
               <a:pPr>
                 <a:defRPr/>
               </a:pPr>
-              <a:t>21/07/2026</a:t>
+              <a:t>05/10/2026</a:t>
             </a:fld>
             <a:endParaRPr lang="es-ES"/>
           </a:p>
@@ -14440,7 +14497,7 @@
               <a:pPr>
                 <a:defRPr/>
               </a:pPr>
-              <a:t>21/07/2026</a:t>
+              <a:t>05/10/2026</a:t>
             </a:fld>
             <a:endParaRPr lang="es-ES"/>
           </a:p>
@@ -14799,7 +14856,7 @@
               <a:pPr>
                 <a:defRPr/>
               </a:pPr>
-              <a:t>21/07/2026</a:t>
+              <a:t>05/10/2026</a:t>
             </a:fld>
             <a:endParaRPr lang="es-ES"/>
           </a:p>
@@ -15040,7 +15097,7 @@
               <a:pPr>
                 <a:defRPr/>
               </a:pPr>
-              <a:t>21/07/2026</a:t>
+              <a:t>05/10/2026</a:t>
             </a:fld>
             <a:endParaRPr lang="es-ES"/>
           </a:p>
@@ -15357,7 +15414,7 @@
               <a:pPr>
                 <a:defRPr/>
               </a:pPr>
-              <a:t>21/07/2026</a:t>
+              <a:t>05/10/2026</a:t>
             </a:fld>
             <a:endParaRPr lang="es-ES"/>
           </a:p>
@@ -15716,7 +15773,7 @@
               <a:pPr>
                 <a:defRPr/>
               </a:pPr>
-              <a:t>21/07/2026</a:t>
+              <a:t>05/10/2026</a:t>
             </a:fld>
             <a:endParaRPr lang="es-ES"/>
           </a:p>
@@ -16209,7 +16266,7 @@
               <a:pPr>
                 <a:defRPr/>
               </a:pPr>
-              <a:t>21/07/2026</a:t>
+              <a:t>05/10/2026</a:t>
             </a:fld>
             <a:endParaRPr lang="es-ES"/>
           </a:p>
@@ -16398,7 +16455,7 @@
               <a:pPr>
                 <a:defRPr/>
               </a:pPr>
-              <a:t>21/07/2026</a:t>
+              <a:t>05/10/2026</a:t>
             </a:fld>
             <a:endParaRPr lang="es-ES"/>
           </a:p>
@@ -16564,7 +16621,7 @@
               <a:pPr>
                 <a:defRPr/>
               </a:pPr>
-              <a:t>21/07/2026</a:t>
+              <a:t>05/10/2026</a:t>
             </a:fld>
             <a:endParaRPr lang="es-ES"/>
           </a:p>
@@ -16854,7 +16911,7 @@
               <a:pPr>
                 <a:defRPr/>
               </a:pPr>
-              <a:t>21/07/2026</a:t>
+              <a:t>05/10/2026</a:t>
             </a:fld>
             <a:endParaRPr lang="es-ES"/>
           </a:p>
@@ -17202,7 +17259,7 @@
               <a:pPr>
                 <a:defRPr/>
               </a:pPr>
-              <a:t>21/07/2026</a:t>
+              <a:t>05/10/2026</a:t>
             </a:fld>
             <a:endParaRPr lang="es-ES"/>
           </a:p>
@@ -17529,7 +17586,7 @@
               <a:pPr>
                 <a:defRPr/>
               </a:pPr>
-              <a:t>21/07/2026</a:t>
+              <a:t>05/10/2026</a:t>
             </a:fld>
             <a:endParaRPr lang="es-ES"/>
           </a:p>
@@ -17770,7 +17827,7 @@
               <a:pPr>
                 <a:defRPr/>
               </a:pPr>
-              <a:t>21/07/2026</a:t>
+              <a:t>05/10/2026</a:t>
             </a:fld>
             <a:endParaRPr lang="es-ES"/>
           </a:p>
@@ -18263,7 +18320,7 @@
               <a:pPr>
                 <a:defRPr/>
               </a:pPr>
-              <a:t>21/07/2026</a:t>
+              <a:t>05/10/2026</a:t>
             </a:fld>
             <a:endParaRPr lang="es-ES"/>
           </a:p>
@@ -18514,7 +18571,7 @@
               <a:pPr>
                 <a:defRPr/>
               </a:pPr>
-              <a:t>21/07/2026</a:t>
+              <a:t>05/10/2026</a:t>
             </a:fld>
             <a:endParaRPr lang="es-ES"/>
           </a:p>
@@ -18917,7 +18974,7 @@
               <a:pPr>
                 <a:defRPr/>
               </a:pPr>
-              <a:t>21/07/2026</a:t>
+              <a:t>05/10/2026</a:t>
             </a:fld>
             <a:endParaRPr lang="es-ES"/>
           </a:p>
@@ -19158,7 +19215,7 @@
               <a:pPr>
                 <a:defRPr/>
               </a:pPr>
-              <a:t>21/07/2026</a:t>
+              <a:t>05/10/2026</a:t>
             </a:fld>
             <a:endParaRPr lang="es-ES"/>
           </a:p>
@@ -19475,7 +19532,7 @@
               <a:pPr>
                 <a:defRPr/>
               </a:pPr>
-              <a:t>21/07/2026</a:t>
+              <a:t>05/10/2026</a:t>
             </a:fld>
             <a:endParaRPr lang="es-ES"/>
           </a:p>
@@ -19834,7 +19891,7 @@
               <a:pPr>
                 <a:defRPr/>
               </a:pPr>
-              <a:t>21/07/2026</a:t>
+              <a:t>05/10/2026</a:t>
             </a:fld>
             <a:endParaRPr lang="es-ES"/>
           </a:p>
@@ -20327,7 +20384,7 @@
               <a:pPr>
                 <a:defRPr/>
               </a:pPr>
-              <a:t>21/07/2026</a:t>
+              <a:t>05/10/2026</a:t>
             </a:fld>
             <a:endParaRPr lang="es-ES"/>
           </a:p>
@@ -20516,7 +20573,7 @@
               <a:pPr>
                 <a:defRPr/>
               </a:pPr>
-              <a:t>21/07/2026</a:t>
+              <a:t>05/10/2026</a:t>
             </a:fld>
             <a:endParaRPr lang="es-ES"/>
           </a:p>
@@ -20682,7 +20739,7 @@
               <a:pPr>
                 <a:defRPr/>
               </a:pPr>
-              <a:t>21/07/2026</a:t>
+              <a:t>05/10/2026</a:t>
             </a:fld>
             <a:endParaRPr lang="es-ES"/>
           </a:p>
@@ -20972,7 +21029,7 @@
               <a:pPr>
                 <a:defRPr/>
               </a:pPr>
-              <a:t>21/07/2026</a:t>
+              <a:t>05/10/2026</a:t>
             </a:fld>
             <a:endParaRPr lang="es-ES"/>
           </a:p>
@@ -21161,7 +21218,7 @@
               <a:pPr>
                 <a:defRPr/>
               </a:pPr>
-              <a:t>21/07/2026</a:t>
+              <a:t>05/10/2026</a:t>
             </a:fld>
             <a:endParaRPr lang="es-ES"/>
           </a:p>
@@ -21509,7 +21566,7 @@
               <a:pPr>
                 <a:defRPr/>
               </a:pPr>
-              <a:t>21/07/2026</a:t>
+              <a:t>05/10/2026</a:t>
             </a:fld>
             <a:endParaRPr lang="es-ES"/>
           </a:p>
@@ -21836,7 +21893,7 @@
               <a:pPr>
                 <a:defRPr/>
               </a:pPr>
-              <a:t>21/07/2026</a:t>
+              <a:t>05/10/2026</a:t>
             </a:fld>
             <a:endParaRPr lang="es-ES"/>
           </a:p>
@@ -22077,7 +22134,7 @@
               <a:pPr>
                 <a:defRPr/>
               </a:pPr>
-              <a:t>21/07/2026</a:t>
+              <a:t>05/10/2026</a:t>
             </a:fld>
             <a:endParaRPr lang="es-ES"/>
           </a:p>
@@ -22328,7 +22385,7 @@
               <a:pPr>
                 <a:defRPr/>
               </a:pPr>
-              <a:t>21/07/2026</a:t>
+              <a:t>05/10/2026</a:t>
             </a:fld>
             <a:endParaRPr lang="es-ES"/>
           </a:p>
@@ -23228,7 +23285,7 @@
               <a:pPr>
                 <a:defRPr/>
               </a:pPr>
-              <a:t>21/07/2026</a:t>
+              <a:t>05/10/2026</a:t>
             </a:fld>
             <a:endParaRPr lang="es-ES"/>
           </a:p>
@@ -23564,7 +23621,7 @@
               <a:pPr>
                 <a:defRPr/>
               </a:pPr>
-              <a:t>21/07/2026</a:t>
+              <a:t>05/10/2026</a:t>
             </a:fld>
             <a:endParaRPr lang="es-ES"/>
           </a:p>
@@ -24310,7 +24367,7 @@
               <a:pPr>
                 <a:defRPr/>
               </a:pPr>
-              <a:t>21/07/2026</a:t>
+              <a:t>05/10/2026</a:t>
             </a:fld>
             <a:endParaRPr lang="es-MX"/>
           </a:p>
@@ -25016,7 +25073,7 @@
               <a:pPr>
                 <a:defRPr/>
               </a:pPr>
-              <a:t>21/07/2026</a:t>
+              <a:t>05/10/2026</a:t>
             </a:fld>
             <a:endParaRPr lang="es-ES"/>
           </a:p>
@@ -25830,7 +25887,7 @@
               <a:pPr>
                 <a:defRPr/>
               </a:pPr>
-              <a:t>21/07/2026</a:t>
+              <a:t>05/10/2026</a:t>
             </a:fld>
             <a:endParaRPr lang="es-ES"/>
           </a:p>
@@ -26644,7 +26701,7 @@
               <a:pPr>
                 <a:defRPr/>
               </a:pPr>
-              <a:t>21/07/2026</a:t>
+              <a:t>05/10/2026</a:t>
             </a:fld>
             <a:endParaRPr lang="es-ES"/>
           </a:p>
@@ -32787,7 +32844,7 @@
           <p:nvPr>
             <p:extLst>
               <p:ext uri="{D42A27DB-BD31-4B8C-83A1-F6EECF244321}">
-                <p14:modId xmlns:p14="http://schemas.microsoft.com/office/powerpoint/2010/main" val="4003372066"/>
+                <p14:modId xmlns:p14="http://schemas.microsoft.com/office/powerpoint/2010/main" val="1743907199"/>
               </p:ext>
             </p:extLst>
           </p:nvPr>
@@ -32817,7 +32874,7 @@
           <p:nvPr>
             <p:extLst>
               <p:ext uri="{D42A27DB-BD31-4B8C-83A1-F6EECF244321}">
-                <p14:modId xmlns:p14="http://schemas.microsoft.com/office/powerpoint/2010/main" val="2810483306"/>
+                <p14:modId xmlns:p14="http://schemas.microsoft.com/office/powerpoint/2010/main" val="3170581271"/>
               </p:ext>
             </p:extLst>
           </p:nvPr>
@@ -33584,15 +33641,6 @@
                       <a:pPr algn="ctr" fontAlgn="b">
                         <a:buNone/>
                       </a:pPr>
-                      <a:r>
-                        <a:rPr lang="es-MX" sz="1000" b="1" dirty="0">
-                          <a:solidFill>
-                            <a:schemeClr val="tx1"/>
-                          </a:solidFill>
-                          <a:latin typeface="Montserrat" panose="00000500000000000000" pitchFamily="2" charset="0"/>
-                        </a:rPr>
-                        <a:t>76,679</a:t>
-                      </a:r>
                       <a:endParaRPr lang="es-MX" sz="1000" b="1" i="0" u="none" strike="noStrike" dirty="0">
                         <a:solidFill>
                           <a:schemeClr val="tx1"/>
@@ -33670,15 +33718,6 @@
                       <a:pPr algn="ctr" fontAlgn="b">
                         <a:buNone/>
                       </a:pPr>
-                      <a:r>
-                        <a:rPr lang="es-MX" sz="1000" b="1" dirty="0">
-                          <a:solidFill>
-                            <a:schemeClr val="tx1"/>
-                          </a:solidFill>
-                          <a:latin typeface="Montserrat" panose="00000500000000000000" pitchFamily="2" charset="0"/>
-                        </a:rPr>
-                        <a:t>70.2%</a:t>
-                      </a:r>
                       <a:endParaRPr lang="es-MX" sz="1000" b="1" i="0" u="none" strike="noStrike" dirty="0">
                         <a:solidFill>
                           <a:schemeClr val="tx1"/>
@@ -33770,20 +33809,17 @@
                         <a:tabLst/>
                         <a:defRPr/>
                       </a:pPr>
-                      <a:r>
-                        <a:rPr kumimoji="0" lang="es-MX" altLang="es-MX" sz="1000" b="1" i="0" u="none" strike="noStrike" cap="none" normalizeH="0" baseline="0" dirty="0">
-                          <a:ln>
-                            <a:noFill/>
-                          </a:ln>
-                          <a:solidFill>
-                            <a:schemeClr val="tx1"/>
-                          </a:solidFill>
-                          <a:effectLst/>
-                          <a:latin typeface="Montserrat" panose="00000500000000000000" pitchFamily="2" charset="0"/>
-                          <a:cs typeface="Arial" panose="020B0604020202020204" pitchFamily="34" charset="0"/>
-                        </a:rPr>
-                        <a:t>68.5%</a:t>
-                      </a:r>
+                      <a:endParaRPr kumimoji="0" lang="es-MX" altLang="es-MX" sz="1000" b="1" i="0" u="none" strike="noStrike" cap="none" normalizeH="0" baseline="0" dirty="0">
+                        <a:ln>
+                          <a:noFill/>
+                        </a:ln>
+                        <a:solidFill>
+                          <a:schemeClr val="tx1"/>
+                        </a:solidFill>
+                        <a:effectLst/>
+                        <a:latin typeface="Montserrat" panose="00000500000000000000" pitchFamily="2" charset="0"/>
+                        <a:cs typeface="Arial" panose="020B0604020202020204" pitchFamily="34" charset="0"/>
+                      </a:endParaRPr>
                     </a:p>
                   </a:txBody>
                   <a:tcPr marL="7651" marR="7651" marT="7651" marB="0" anchor="ctr">
@@ -33854,26 +33890,6 @@
                       <a:pPr algn="ctr" fontAlgn="b">
                         <a:buNone/>
                       </a:pPr>
-                      <a:r>
-                        <a:rPr lang="es-MX" sz="1000" b="1" i="0" u="none" strike="noStrike" dirty="0">
-                          <a:solidFill>
-                            <a:srgbClr val="00B050"/>
-                          </a:solidFill>
-                          <a:effectLst/>
-                          <a:latin typeface="Montserrat" panose="00000500000000000000" pitchFamily="2" charset="0"/>
-                        </a:rPr>
-                        <a:t>1.7 </a:t>
-                      </a:r>
-                      <a:r>
-                        <a:rPr lang="es-MX" sz="1000" b="1" i="0" u="none" strike="noStrike" dirty="0" err="1">
-                          <a:solidFill>
-                            <a:srgbClr val="00B050"/>
-                          </a:solidFill>
-                          <a:effectLst/>
-                          <a:latin typeface="Montserrat" panose="00000500000000000000" pitchFamily="2" charset="0"/>
-                        </a:rPr>
-                        <a:t>pp</a:t>
-                      </a:r>
                       <a:endParaRPr lang="es-MX" sz="1000" b="1" i="0" u="none" strike="noStrike" dirty="0">
                         <a:solidFill>
                           <a:srgbClr val="00B050"/>
@@ -33958,13 +33974,10 @@
                       <a:pPr algn="ctr" fontAlgn="b">
                         <a:buNone/>
                       </a:pPr>
-                      <a:r>
-                        <a:rPr lang="es-MX" sz="1000" b="0" i="0" u="none" strike="noStrike" dirty="0">
-                          <a:effectLst/>
-                          <a:latin typeface="Montserrat" panose="00000500000000000000" pitchFamily="2" charset="0"/>
-                        </a:rPr>
-                        <a:t>60,538</a:t>
-                      </a:r>
+                      <a:endParaRPr lang="es-MX" sz="1000" b="0" i="0" u="none" strike="noStrike" dirty="0">
+                        <a:effectLst/>
+                        <a:latin typeface="Montserrat" panose="00000500000000000000" pitchFamily="2" charset="0"/>
+                      </a:endParaRPr>
                     </a:p>
                   </a:txBody>
                   <a:tcPr marL="7651" marR="7651" marT="7651" marB="0" anchor="ctr">
@@ -34030,13 +34043,10 @@
                       <a:pPr algn="ctr" fontAlgn="b">
                         <a:buNone/>
                       </a:pPr>
-                      <a:r>
-                        <a:rPr lang="es-MX" sz="1000" b="1" i="0" u="none" strike="noStrike" dirty="0">
-                          <a:effectLst/>
-                          <a:latin typeface="Montserrat" panose="00000500000000000000" pitchFamily="2" charset="0"/>
-                        </a:rPr>
-                        <a:t>71.6%</a:t>
-                      </a:r>
+                      <a:endParaRPr lang="es-MX" sz="1000" b="1" i="0" u="none" strike="noStrike" dirty="0">
+                        <a:effectLst/>
+                        <a:latin typeface="Montserrat" panose="00000500000000000000" pitchFamily="2" charset="0"/>
+                      </a:endParaRPr>
                     </a:p>
                   </a:txBody>
                   <a:tcPr marL="7651" marR="7651" marT="7651" marB="0" anchor="ctr">
@@ -34105,13 +34115,10 @@
                       <a:pPr algn="ctr" fontAlgn="b">
                         <a:buNone/>
                       </a:pPr>
-                      <a:r>
-                        <a:rPr lang="es-MX" sz="1000" b="0" i="0" u="none" strike="noStrike" dirty="0">
-                          <a:effectLst/>
-                          <a:latin typeface="Montserrat" panose="00000500000000000000" pitchFamily="2" charset="0"/>
-                        </a:rPr>
-                        <a:t>69.3%</a:t>
-                      </a:r>
+                      <a:endParaRPr lang="es-MX" sz="1000" b="0" i="0" u="none" strike="noStrike" dirty="0">
+                        <a:effectLst/>
+                        <a:latin typeface="Montserrat" panose="00000500000000000000" pitchFamily="2" charset="0"/>
+                      </a:endParaRPr>
                     </a:p>
                   </a:txBody>
                   <a:tcPr marL="7651" marR="7651" marT="7651" marB="0" anchor="ctr">
@@ -34178,26 +34185,6 @@
                       <a:pPr algn="ctr" fontAlgn="b">
                         <a:buNone/>
                       </a:pPr>
-                      <a:r>
-                        <a:rPr lang="es-MX" sz="1000" b="0" i="0" u="none" strike="noStrike" dirty="0">
-                          <a:solidFill>
-                            <a:srgbClr val="00B050"/>
-                          </a:solidFill>
-                          <a:effectLst/>
-                          <a:latin typeface="Montserrat" panose="00000500000000000000" pitchFamily="2" charset="0"/>
-                        </a:rPr>
-                        <a:t>2.3 </a:t>
-                      </a:r>
-                      <a:r>
-                        <a:rPr lang="es-MX" sz="1000" b="0" i="0" u="none" strike="noStrike" dirty="0" err="1">
-                          <a:solidFill>
-                            <a:srgbClr val="00B050"/>
-                          </a:solidFill>
-                          <a:effectLst/>
-                          <a:latin typeface="Montserrat" panose="00000500000000000000" pitchFamily="2" charset="0"/>
-                        </a:rPr>
-                        <a:t>pp</a:t>
-                      </a:r>
                       <a:endParaRPr lang="es-MX" sz="1000" b="0" i="0" u="none" strike="noStrike" dirty="0">
                         <a:solidFill>
                           <a:srgbClr val="00B050"/>
@@ -34278,13 +34265,10 @@
                       <a:pPr algn="ctr" fontAlgn="b">
                         <a:buNone/>
                       </a:pPr>
-                      <a:r>
-                        <a:rPr lang="es-MX" sz="1000" b="0" i="0" u="none" strike="noStrike" dirty="0">
-                          <a:effectLst/>
-                          <a:latin typeface="Montserrat" panose="00000500000000000000" pitchFamily="2" charset="0"/>
-                        </a:rPr>
-                        <a:t>7,074</a:t>
-                      </a:r>
+                      <a:endParaRPr lang="es-MX" sz="1000" b="0" i="0" u="none" strike="noStrike" dirty="0">
+                        <a:effectLst/>
+                        <a:latin typeface="Montserrat" panose="00000500000000000000" pitchFamily="2" charset="0"/>
+                      </a:endParaRPr>
                     </a:p>
                   </a:txBody>
                   <a:tcPr marL="7651" marR="7651" marT="7651" marB="0" anchor="ctr">
@@ -34350,13 +34334,10 @@
                       <a:pPr algn="ctr" fontAlgn="b">
                         <a:buNone/>
                       </a:pPr>
-                      <a:r>
-                        <a:rPr lang="es-MX" sz="1000" b="1" i="0" u="none" strike="noStrike" dirty="0">
-                          <a:effectLst/>
-                          <a:latin typeface="Montserrat" panose="00000500000000000000" pitchFamily="2" charset="0"/>
-                        </a:rPr>
-                        <a:t>68.8%</a:t>
-                      </a:r>
+                      <a:endParaRPr lang="es-MX" sz="1000" b="1" i="0" u="none" strike="noStrike" dirty="0">
+                        <a:effectLst/>
+                        <a:latin typeface="Montserrat" panose="00000500000000000000" pitchFamily="2" charset="0"/>
+                      </a:endParaRPr>
                     </a:p>
                   </a:txBody>
                   <a:tcPr marL="7651" marR="7651" marT="7651" marB="0" anchor="ctr">
@@ -34425,13 +34406,10 @@
                       <a:pPr algn="ctr" fontAlgn="b">
                         <a:buNone/>
                       </a:pPr>
-                      <a:r>
-                        <a:rPr lang="es-MX" sz="1000" b="0" i="0" u="none" strike="noStrike" dirty="0">
-                          <a:effectLst/>
-                          <a:latin typeface="Montserrat" panose="00000500000000000000" pitchFamily="2" charset="0"/>
-                        </a:rPr>
-                        <a:t>69.7%</a:t>
-                      </a:r>
+                      <a:endParaRPr lang="es-MX" sz="1000" b="0" i="0" u="none" strike="noStrike" dirty="0">
+                        <a:effectLst/>
+                        <a:latin typeface="Montserrat" panose="00000500000000000000" pitchFamily="2" charset="0"/>
+                      </a:endParaRPr>
                     </a:p>
                   </a:txBody>
                   <a:tcPr marL="7651" marR="7651" marT="7651" marB="0" anchor="ctr">
@@ -34498,26 +34476,6 @@
                       <a:pPr algn="ctr" fontAlgn="b">
                         <a:buNone/>
                       </a:pPr>
-                      <a:r>
-                        <a:rPr lang="es-MX" sz="1000" b="0" i="0" u="none" strike="noStrike" dirty="0">
-                          <a:solidFill>
-                            <a:srgbClr val="FF0000"/>
-                          </a:solidFill>
-                          <a:effectLst/>
-                          <a:latin typeface="Montserrat" panose="00000500000000000000" pitchFamily="2" charset="0"/>
-                        </a:rPr>
-                        <a:t>-0.9 </a:t>
-                      </a:r>
-                      <a:r>
-                        <a:rPr lang="es-MX" sz="1000" b="0" i="0" u="none" strike="noStrike" dirty="0" err="1">
-                          <a:solidFill>
-                            <a:srgbClr val="FF0000"/>
-                          </a:solidFill>
-                          <a:effectLst/>
-                          <a:latin typeface="Montserrat" panose="00000500000000000000" pitchFamily="2" charset="0"/>
-                        </a:rPr>
-                        <a:t>pp</a:t>
-                      </a:r>
                       <a:endParaRPr lang="es-MX" sz="1000" b="0" i="0" u="none" strike="noStrike" dirty="0">
                         <a:solidFill>
                           <a:srgbClr val="FF0000"/>
@@ -34598,13 +34556,10 @@
                       <a:pPr algn="ctr" fontAlgn="b">
                         <a:buNone/>
                       </a:pPr>
-                      <a:r>
-                        <a:rPr lang="es-MX" sz="1000" b="0" i="0" u="none" strike="noStrike" dirty="0">
-                          <a:effectLst/>
-                          <a:latin typeface="Montserrat" panose="00000500000000000000" pitchFamily="2" charset="0"/>
-                        </a:rPr>
-                        <a:t>4,385</a:t>
-                      </a:r>
+                      <a:endParaRPr lang="es-MX" sz="1000" b="0" i="0" u="none" strike="noStrike" dirty="0">
+                        <a:effectLst/>
+                        <a:latin typeface="Montserrat" panose="00000500000000000000" pitchFamily="2" charset="0"/>
+                      </a:endParaRPr>
                     </a:p>
                   </a:txBody>
                   <a:tcPr marL="7651" marR="7651" marT="7651" marB="0" anchor="ctr">
@@ -34670,13 +34625,10 @@
                       <a:pPr algn="ctr" fontAlgn="b">
                         <a:buNone/>
                       </a:pPr>
-                      <a:r>
-                        <a:rPr lang="es-MX" sz="1000" b="1" i="0" u="none" strike="noStrike" dirty="0">
-                          <a:effectLst/>
-                          <a:latin typeface="Montserrat" panose="00000500000000000000" pitchFamily="2" charset="0"/>
-                        </a:rPr>
-                        <a:t>59.5%</a:t>
-                      </a:r>
+                      <a:endParaRPr lang="es-MX" sz="1000" b="1" i="0" u="none" strike="noStrike" dirty="0">
+                        <a:effectLst/>
+                        <a:latin typeface="Montserrat" panose="00000500000000000000" pitchFamily="2" charset="0"/>
+                      </a:endParaRPr>
                     </a:p>
                   </a:txBody>
                   <a:tcPr marL="7651" marR="7651" marT="7651" marB="0" anchor="ctr">
@@ -34745,13 +34697,10 @@
                       <a:pPr algn="ctr" fontAlgn="b">
                         <a:buNone/>
                       </a:pPr>
-                      <a:r>
-                        <a:rPr lang="es-MX" sz="1000" b="0" i="0" u="none" strike="noStrike" dirty="0">
-                          <a:effectLst/>
-                          <a:latin typeface="Montserrat" panose="00000500000000000000" pitchFamily="2" charset="0"/>
-                        </a:rPr>
-                        <a:t>61.0%</a:t>
-                      </a:r>
+                      <a:endParaRPr lang="es-MX" sz="1000" b="0" i="0" u="none" strike="noStrike" dirty="0">
+                        <a:effectLst/>
+                        <a:latin typeface="Montserrat" panose="00000500000000000000" pitchFamily="2" charset="0"/>
+                      </a:endParaRPr>
                     </a:p>
                   </a:txBody>
                   <a:tcPr marL="7651" marR="7651" marT="7651" marB="0" anchor="ctr">
@@ -34818,26 +34767,6 @@
                       <a:pPr algn="ctr" fontAlgn="b">
                         <a:buNone/>
                       </a:pPr>
-                      <a:r>
-                        <a:rPr lang="es-MX" sz="1000" b="0" i="0" u="none" strike="noStrike" dirty="0">
-                          <a:solidFill>
-                            <a:srgbClr val="FF0000"/>
-                          </a:solidFill>
-                          <a:effectLst/>
-                          <a:latin typeface="Montserrat" panose="00000500000000000000" pitchFamily="2" charset="0"/>
-                        </a:rPr>
-                        <a:t>-1.5 </a:t>
-                      </a:r>
-                      <a:r>
-                        <a:rPr lang="es-MX" sz="1000" b="0" i="0" u="none" strike="noStrike" dirty="0" err="1">
-                          <a:solidFill>
-                            <a:srgbClr val="FF0000"/>
-                          </a:solidFill>
-                          <a:effectLst/>
-                          <a:latin typeface="Montserrat" panose="00000500000000000000" pitchFamily="2" charset="0"/>
-                        </a:rPr>
-                        <a:t>pp</a:t>
-                      </a:r>
                       <a:endParaRPr lang="es-MX" sz="1000" b="0" i="0" u="none" strike="noStrike" dirty="0">
                         <a:solidFill>
                           <a:srgbClr val="FF0000"/>
@@ -34918,13 +34847,10 @@
                       <a:pPr algn="ctr" fontAlgn="b">
                         <a:buNone/>
                       </a:pPr>
-                      <a:r>
-                        <a:rPr lang="es-MX" sz="1000" b="0" i="0" u="none" strike="noStrike" dirty="0">
-                          <a:effectLst/>
-                          <a:latin typeface="Montserrat" panose="00000500000000000000" pitchFamily="2" charset="0"/>
-                        </a:rPr>
-                        <a:t>2,651</a:t>
-                      </a:r>
+                      <a:endParaRPr lang="es-MX" sz="1000" b="0" i="0" u="none" strike="noStrike" dirty="0">
+                        <a:effectLst/>
+                        <a:latin typeface="Montserrat" panose="00000500000000000000" pitchFamily="2" charset="0"/>
+                      </a:endParaRPr>
                     </a:p>
                   </a:txBody>
                   <a:tcPr marL="7651" marR="7651" marT="7651" marB="0" anchor="ctr">
@@ -34990,13 +34916,10 @@
                       <a:pPr algn="ctr" fontAlgn="b">
                         <a:buNone/>
                       </a:pPr>
-                      <a:r>
-                        <a:rPr lang="es-MX" sz="1000" b="1" i="0" u="none" strike="noStrike" dirty="0">
-                          <a:effectLst/>
-                          <a:latin typeface="Montserrat" panose="00000500000000000000" pitchFamily="2" charset="0"/>
-                        </a:rPr>
-                        <a:t>64.8%</a:t>
-                      </a:r>
+                      <a:endParaRPr lang="es-MX" sz="1000" b="1" i="0" u="none" strike="noStrike" dirty="0">
+                        <a:effectLst/>
+                        <a:latin typeface="Montserrat" panose="00000500000000000000" pitchFamily="2" charset="0"/>
+                      </a:endParaRPr>
                     </a:p>
                   </a:txBody>
                   <a:tcPr marL="7651" marR="7651" marT="7651" marB="0" anchor="ctr">
@@ -35065,13 +34988,10 @@
                       <a:pPr algn="ctr" fontAlgn="b">
                         <a:buNone/>
                       </a:pPr>
-                      <a:r>
-                        <a:rPr lang="es-MX" sz="1000" b="0" i="0" u="none" strike="noStrike" dirty="0">
-                          <a:effectLst/>
-                          <a:latin typeface="Montserrat" panose="00000500000000000000" pitchFamily="2" charset="0"/>
-                        </a:rPr>
-                        <a:t>62.7%</a:t>
-                      </a:r>
+                      <a:endParaRPr lang="es-MX" sz="1000" b="0" i="0" u="none" strike="noStrike" dirty="0">
+                        <a:effectLst/>
+                        <a:latin typeface="Montserrat" panose="00000500000000000000" pitchFamily="2" charset="0"/>
+                      </a:endParaRPr>
                     </a:p>
                   </a:txBody>
                   <a:tcPr marL="7651" marR="7651" marT="7651" marB="0" anchor="ctr">
@@ -35138,26 +35058,6 @@
                       <a:pPr algn="ctr" fontAlgn="b">
                         <a:buNone/>
                       </a:pPr>
-                      <a:r>
-                        <a:rPr lang="es-MX" sz="1000" b="0" i="0" u="none" strike="noStrike" dirty="0">
-                          <a:solidFill>
-                            <a:srgbClr val="00B050"/>
-                          </a:solidFill>
-                          <a:effectLst/>
-                          <a:latin typeface="Montserrat" panose="00000500000000000000" pitchFamily="2" charset="0"/>
-                        </a:rPr>
-                        <a:t>2.1 </a:t>
-                      </a:r>
-                      <a:r>
-                        <a:rPr lang="es-MX" sz="1000" b="0" i="0" u="none" strike="noStrike" dirty="0" err="1">
-                          <a:solidFill>
-                            <a:srgbClr val="00B050"/>
-                          </a:solidFill>
-                          <a:effectLst/>
-                          <a:latin typeface="Montserrat" panose="00000500000000000000" pitchFamily="2" charset="0"/>
-                        </a:rPr>
-                        <a:t>pp</a:t>
-                      </a:r>
                       <a:endParaRPr lang="es-MX" sz="1000" b="0" i="0" u="none" strike="noStrike" dirty="0">
                         <a:solidFill>
                           <a:srgbClr val="00B050"/>
@@ -35238,13 +35138,10 @@
                       <a:pPr algn="ctr" fontAlgn="b">
                         <a:buNone/>
                       </a:pPr>
-                      <a:r>
-                        <a:rPr lang="es-MX" sz="1000" b="0" i="0" u="none" strike="noStrike" dirty="0">
-                          <a:effectLst/>
-                          <a:latin typeface="Montserrat" panose="00000500000000000000" pitchFamily="2" charset="0"/>
-                        </a:rPr>
-                        <a:t>1,008</a:t>
-                      </a:r>
+                      <a:endParaRPr lang="es-MX" sz="1000" b="0" i="0" u="none" strike="noStrike" dirty="0">
+                        <a:effectLst/>
+                        <a:latin typeface="Montserrat" panose="00000500000000000000" pitchFamily="2" charset="0"/>
+                      </a:endParaRPr>
                     </a:p>
                   </a:txBody>
                   <a:tcPr marL="7651" marR="7651" marT="7651" marB="0" anchor="ctr">
@@ -35310,13 +35207,10 @@
                       <a:pPr algn="ctr" fontAlgn="b">
                         <a:buNone/>
                       </a:pPr>
-                      <a:r>
-                        <a:rPr lang="es-MX" sz="1000" b="1" i="0" u="none" strike="noStrike" dirty="0">
-                          <a:effectLst/>
-                          <a:latin typeface="Montserrat" panose="00000500000000000000" pitchFamily="2" charset="0"/>
-                        </a:rPr>
-                        <a:t>76.3%</a:t>
-                      </a:r>
+                      <a:endParaRPr lang="es-MX" sz="1000" b="1" i="0" u="none" strike="noStrike" dirty="0">
+                        <a:effectLst/>
+                        <a:latin typeface="Montserrat" panose="00000500000000000000" pitchFamily="2" charset="0"/>
+                      </a:endParaRPr>
                     </a:p>
                   </a:txBody>
                   <a:tcPr marL="7651" marR="7651" marT="7651" marB="0" anchor="ctr">
@@ -35385,13 +35279,10 @@
                       <a:pPr algn="ctr" fontAlgn="b">
                         <a:buNone/>
                       </a:pPr>
-                      <a:r>
-                        <a:rPr lang="es-MX" sz="1000" b="0" i="0" u="none" strike="noStrike" dirty="0">
-                          <a:effectLst/>
-                          <a:latin typeface="Montserrat" panose="00000500000000000000" pitchFamily="2" charset="0"/>
-                        </a:rPr>
-                        <a:t>76.8%</a:t>
-                      </a:r>
+                      <a:endParaRPr lang="es-MX" sz="1000" b="0" i="0" u="none" strike="noStrike" dirty="0">
+                        <a:effectLst/>
+                        <a:latin typeface="Montserrat" panose="00000500000000000000" pitchFamily="2" charset="0"/>
+                      </a:endParaRPr>
                     </a:p>
                   </a:txBody>
                   <a:tcPr marL="7651" marR="7651" marT="7651" marB="0" anchor="ctr">
@@ -35458,26 +35349,6 @@
                       <a:pPr algn="ctr" fontAlgn="b">
                         <a:buNone/>
                       </a:pPr>
-                      <a:r>
-                        <a:rPr lang="es-MX" sz="1000" b="0" i="0" u="none" strike="noStrike" dirty="0">
-                          <a:solidFill>
-                            <a:srgbClr val="FF0000"/>
-                          </a:solidFill>
-                          <a:effectLst/>
-                          <a:latin typeface="Montserrat" panose="00000500000000000000" pitchFamily="2" charset="0"/>
-                        </a:rPr>
-                        <a:t>-0.5 </a:t>
-                      </a:r>
-                      <a:r>
-                        <a:rPr lang="es-MX" sz="1000" b="0" i="0" u="none" strike="noStrike" dirty="0" err="1">
-                          <a:solidFill>
-                            <a:srgbClr val="FF0000"/>
-                          </a:solidFill>
-                          <a:effectLst/>
-                          <a:latin typeface="Montserrat" panose="00000500000000000000" pitchFamily="2" charset="0"/>
-                        </a:rPr>
-                        <a:t>pp</a:t>
-                      </a:r>
                       <a:endParaRPr lang="es-MX" sz="1000" b="0" i="0" u="none" strike="noStrike" dirty="0">
                         <a:solidFill>
                           <a:srgbClr val="FF0000"/>
@@ -35558,13 +35429,10 @@
                       <a:pPr algn="ctr" fontAlgn="b">
                         <a:buNone/>
                       </a:pPr>
-                      <a:r>
-                        <a:rPr lang="es-MX" sz="1000" b="0" i="0" u="none" strike="noStrike" dirty="0">
-                          <a:effectLst/>
-                          <a:latin typeface="Montserrat" panose="00000500000000000000" pitchFamily="2" charset="0"/>
-                        </a:rPr>
-                        <a:t>762</a:t>
-                      </a:r>
+                      <a:endParaRPr lang="es-MX" sz="1000" b="0" i="0" u="none" strike="noStrike" dirty="0">
+                        <a:effectLst/>
+                        <a:latin typeface="Montserrat" panose="00000500000000000000" pitchFamily="2" charset="0"/>
+                      </a:endParaRPr>
                     </a:p>
                   </a:txBody>
                   <a:tcPr marL="7651" marR="7651" marT="7651" marB="0" anchor="ctr">
@@ -35630,13 +35498,10 @@
                       <a:pPr algn="ctr" fontAlgn="b">
                         <a:buNone/>
                       </a:pPr>
-                      <a:r>
-                        <a:rPr lang="es-MX" sz="1000" b="1" i="0" u="none" strike="noStrike" dirty="0">
-                          <a:effectLst/>
-                          <a:latin typeface="Montserrat" panose="00000500000000000000" pitchFamily="2" charset="0"/>
-                        </a:rPr>
-                        <a:t>50.4%</a:t>
-                      </a:r>
+                      <a:endParaRPr lang="es-MX" sz="1000" b="1" i="0" u="none" strike="noStrike" dirty="0">
+                        <a:effectLst/>
+                        <a:latin typeface="Montserrat" panose="00000500000000000000" pitchFamily="2" charset="0"/>
+                      </a:endParaRPr>
                     </a:p>
                   </a:txBody>
                   <a:tcPr marL="7651" marR="7651" marT="7651" marB="0" anchor="ctr">
@@ -35705,13 +35570,10 @@
                       <a:pPr algn="ctr" fontAlgn="b">
                         <a:buNone/>
                       </a:pPr>
-                      <a:r>
-                        <a:rPr lang="es-MX" sz="1000" b="0" i="0" u="none" strike="noStrike" dirty="0">
-                          <a:effectLst/>
-                          <a:latin typeface="Montserrat" panose="00000500000000000000" pitchFamily="2" charset="0"/>
-                        </a:rPr>
-                        <a:t>51.8%</a:t>
-                      </a:r>
+                      <a:endParaRPr lang="es-MX" sz="1000" b="0" i="0" u="none" strike="noStrike" dirty="0">
+                        <a:effectLst/>
+                        <a:latin typeface="Montserrat" panose="00000500000000000000" pitchFamily="2" charset="0"/>
+                      </a:endParaRPr>
                     </a:p>
                   </a:txBody>
                   <a:tcPr marL="7651" marR="7651" marT="7651" marB="0" anchor="ctr">
@@ -35778,26 +35640,6 @@
                       <a:pPr algn="ctr" fontAlgn="b">
                         <a:buNone/>
                       </a:pPr>
-                      <a:r>
-                        <a:rPr lang="es-MX" sz="1000" b="0" i="0" u="none" strike="noStrike" dirty="0">
-                          <a:solidFill>
-                            <a:srgbClr val="FF0000"/>
-                          </a:solidFill>
-                          <a:effectLst/>
-                          <a:latin typeface="Montserrat" panose="00000500000000000000" pitchFamily="2" charset="0"/>
-                        </a:rPr>
-                        <a:t>-1.4 </a:t>
-                      </a:r>
-                      <a:r>
-                        <a:rPr lang="es-MX" sz="1000" b="0" i="0" u="none" strike="noStrike" dirty="0" err="1">
-                          <a:solidFill>
-                            <a:srgbClr val="FF0000"/>
-                          </a:solidFill>
-                          <a:effectLst/>
-                          <a:latin typeface="Montserrat" panose="00000500000000000000" pitchFamily="2" charset="0"/>
-                        </a:rPr>
-                        <a:t>pp</a:t>
-                      </a:r>
                       <a:endParaRPr lang="es-MX" sz="1000" b="0" i="0" u="none" strike="noStrike" dirty="0">
                         <a:solidFill>
                           <a:srgbClr val="FF0000"/>
@@ -35878,13 +35720,10 @@
                       <a:pPr algn="ctr" fontAlgn="b">
                         <a:buNone/>
                       </a:pPr>
-                      <a:r>
-                        <a:rPr lang="es-MX" sz="1000" b="0" i="0" u="none" strike="noStrike" dirty="0">
-                          <a:effectLst/>
-                          <a:latin typeface="Montserrat" panose="00000500000000000000" pitchFamily="2" charset="0"/>
-                        </a:rPr>
-                        <a:t>256</a:t>
-                      </a:r>
+                      <a:endParaRPr lang="es-MX" sz="1000" b="0" i="0" u="none" strike="noStrike" dirty="0">
+                        <a:effectLst/>
+                        <a:latin typeface="Montserrat" panose="00000500000000000000" pitchFamily="2" charset="0"/>
+                      </a:endParaRPr>
                     </a:p>
                   </a:txBody>
                   <a:tcPr marL="7651" marR="7651" marT="7651" marB="0" anchor="ctr">
@@ -35950,13 +35789,10 @@
                       <a:pPr algn="ctr" fontAlgn="b">
                         <a:buNone/>
                       </a:pPr>
-                      <a:r>
-                        <a:rPr lang="es-MX" sz="1000" b="1" i="0" u="none" strike="noStrike" dirty="0">
-                          <a:effectLst/>
-                          <a:latin typeface="Montserrat" panose="00000500000000000000" pitchFamily="2" charset="0"/>
-                        </a:rPr>
-                        <a:t>67.2%</a:t>
-                      </a:r>
+                      <a:endParaRPr lang="es-MX" sz="1000" b="1" i="0" u="none" strike="noStrike" dirty="0">
+                        <a:effectLst/>
+                        <a:latin typeface="Montserrat" panose="00000500000000000000" pitchFamily="2" charset="0"/>
+                      </a:endParaRPr>
                     </a:p>
                   </a:txBody>
                   <a:tcPr marL="7651" marR="7651" marT="7651" marB="0" anchor="ctr">
@@ -36025,13 +35861,10 @@
                       <a:pPr algn="ctr" fontAlgn="b">
                         <a:buNone/>
                       </a:pPr>
-                      <a:r>
-                        <a:rPr lang="es-MX" sz="1000" b="0" i="0" u="none" strike="noStrike" dirty="0">
-                          <a:effectLst/>
-                          <a:latin typeface="Montserrat" panose="00000500000000000000" pitchFamily="2" charset="0"/>
-                        </a:rPr>
-                        <a:t>65.0%</a:t>
-                      </a:r>
+                      <a:endParaRPr lang="es-MX" sz="1000" b="0" i="0" u="none" strike="noStrike" dirty="0">
+                        <a:effectLst/>
+                        <a:latin typeface="Montserrat" panose="00000500000000000000" pitchFamily="2" charset="0"/>
+                      </a:endParaRPr>
                     </a:p>
                   </a:txBody>
                   <a:tcPr marL="7651" marR="7651" marT="7651" marB="0" anchor="ctr">
@@ -36098,26 +35931,6 @@
                       <a:pPr algn="ctr" fontAlgn="b">
                         <a:buNone/>
                       </a:pPr>
-                      <a:r>
-                        <a:rPr lang="es-MX" sz="1000" b="0" i="0" u="none" strike="noStrike" dirty="0">
-                          <a:solidFill>
-                            <a:srgbClr val="00B050"/>
-                          </a:solidFill>
-                          <a:effectLst/>
-                          <a:latin typeface="Montserrat" panose="00000500000000000000" pitchFamily="2" charset="0"/>
-                        </a:rPr>
-                        <a:t>2.2 </a:t>
-                      </a:r>
-                      <a:r>
-                        <a:rPr lang="es-MX" sz="1000" b="0" i="0" u="none" strike="noStrike" dirty="0" err="1">
-                          <a:solidFill>
-                            <a:srgbClr val="00B050"/>
-                          </a:solidFill>
-                          <a:effectLst/>
-                          <a:latin typeface="Montserrat" panose="00000500000000000000" pitchFamily="2" charset="0"/>
-                        </a:rPr>
-                        <a:t>pp</a:t>
-                      </a:r>
                       <a:endParaRPr lang="es-MX" sz="1000" b="0" i="0" u="none" strike="noStrike" dirty="0">
                         <a:solidFill>
                           <a:srgbClr val="00B050"/>
@@ -36198,13 +36011,10 @@
                       <a:pPr algn="ctr" fontAlgn="b">
                         <a:buNone/>
                       </a:pPr>
-                      <a:r>
-                        <a:rPr lang="es-MX" sz="1000" b="0" i="0" u="none" strike="noStrike" dirty="0">
-                          <a:effectLst/>
-                          <a:latin typeface="Montserrat" panose="00000500000000000000" pitchFamily="2" charset="0"/>
-                        </a:rPr>
-                        <a:t>15</a:t>
-                      </a:r>
+                      <a:endParaRPr lang="es-MX" sz="1000" b="0" i="0" u="none" strike="noStrike" dirty="0">
+                        <a:effectLst/>
+                        <a:latin typeface="Montserrat" panose="00000500000000000000" pitchFamily="2" charset="0"/>
+                      </a:endParaRPr>
                     </a:p>
                   </a:txBody>
                   <a:tcPr marL="7651" marR="7651" marT="7651" marB="0" anchor="ctr">
@@ -36270,13 +36080,10 @@
                       <a:pPr algn="ctr" fontAlgn="b">
                         <a:buNone/>
                       </a:pPr>
-                      <a:r>
-                        <a:rPr lang="es-MX" sz="1000" b="1" i="0" u="none" strike="noStrike" dirty="0">
-                          <a:effectLst/>
-                          <a:latin typeface="Montserrat" panose="00000500000000000000" pitchFamily="2" charset="0"/>
-                        </a:rPr>
-                        <a:t>73.3%</a:t>
-                      </a:r>
+                      <a:endParaRPr lang="es-MX" sz="1000" b="1" i="0" u="none" strike="noStrike" dirty="0">
+                        <a:effectLst/>
+                        <a:latin typeface="Montserrat" panose="00000500000000000000" pitchFamily="2" charset="0"/>
+                      </a:endParaRPr>
                     </a:p>
                   </a:txBody>
                   <a:tcPr marL="7651" marR="7651" marT="7651" marB="0" anchor="ctr">
@@ -36345,13 +36152,10 @@
                       <a:pPr algn="ctr" fontAlgn="b">
                         <a:buNone/>
                       </a:pPr>
-                      <a:r>
-                        <a:rPr lang="es-MX" sz="1000" b="0" i="0" u="none" strike="noStrike" dirty="0">
-                          <a:effectLst/>
-                          <a:latin typeface="Montserrat" panose="00000500000000000000" pitchFamily="2" charset="0"/>
-                        </a:rPr>
-                        <a:t>47.1%</a:t>
-                      </a:r>
+                      <a:endParaRPr lang="es-MX" sz="1000" b="0" i="0" u="none" strike="noStrike" dirty="0">
+                        <a:effectLst/>
+                        <a:latin typeface="Montserrat" panose="00000500000000000000" pitchFamily="2" charset="0"/>
+                      </a:endParaRPr>
                     </a:p>
                   </a:txBody>
                   <a:tcPr marL="7651" marR="7651" marT="7651" marB="0" anchor="ctr">
@@ -36418,26 +36222,6 @@
                       <a:pPr algn="ctr" fontAlgn="b">
                         <a:buNone/>
                       </a:pPr>
-                      <a:r>
-                        <a:rPr lang="es-MX" sz="1000" b="0" i="0" u="none" strike="noStrike" dirty="0">
-                          <a:solidFill>
-                            <a:srgbClr val="00B050"/>
-                          </a:solidFill>
-                          <a:effectLst/>
-                          <a:latin typeface="Montserrat" panose="00000500000000000000" pitchFamily="2" charset="0"/>
-                        </a:rPr>
-                        <a:t>26.2 </a:t>
-                      </a:r>
-                      <a:r>
-                        <a:rPr lang="es-MX" sz="1000" b="0" i="0" u="none" strike="noStrike" dirty="0" err="1">
-                          <a:solidFill>
-                            <a:srgbClr val="00B050"/>
-                          </a:solidFill>
-                          <a:effectLst/>
-                          <a:latin typeface="Montserrat" panose="00000500000000000000" pitchFamily="2" charset="0"/>
-                        </a:rPr>
-                        <a:t>pp</a:t>
-                      </a:r>
                       <a:endParaRPr lang="es-MX" sz="1000" b="0" i="0" u="none" strike="noStrike" dirty="0">
                         <a:solidFill>
                           <a:srgbClr val="00B050"/>
@@ -36518,13 +36302,10 @@
                       <a:pPr algn="ctr" fontAlgn="b">
                         <a:buNone/>
                       </a:pPr>
-                      <a:r>
-                        <a:rPr lang="es-MX" sz="1000" b="0" i="0" u="none" strike="noStrike" dirty="0">
-                          <a:effectLst/>
-                          <a:latin typeface="Montserrat" panose="00000500000000000000" pitchFamily="2" charset="0"/>
-                        </a:rPr>
-                        <a:t>14</a:t>
-                      </a:r>
+                      <a:endParaRPr lang="es-MX" sz="1000" b="0" i="0" u="none" strike="noStrike" dirty="0">
+                        <a:effectLst/>
+                        <a:latin typeface="Montserrat" panose="00000500000000000000" pitchFamily="2" charset="0"/>
+                      </a:endParaRPr>
                     </a:p>
                   </a:txBody>
                   <a:tcPr marL="7651" marR="7651" marT="7651" marB="0" anchor="ctr">
@@ -36590,13 +36371,10 @@
                       <a:pPr algn="ctr" fontAlgn="b">
                         <a:buNone/>
                       </a:pPr>
-                      <a:r>
-                        <a:rPr lang="es-MX" sz="1000" b="1" i="0" u="none" strike="noStrike" dirty="0">
-                          <a:effectLst/>
-                          <a:latin typeface="Montserrat" panose="00000500000000000000" pitchFamily="2" charset="0"/>
-                        </a:rPr>
-                        <a:t>100.0%</a:t>
-                      </a:r>
+                      <a:endParaRPr lang="es-MX" sz="1000" b="1" i="0" u="none" strike="noStrike" dirty="0">
+                        <a:effectLst/>
+                        <a:latin typeface="Montserrat" panose="00000500000000000000" pitchFamily="2" charset="0"/>
+                      </a:endParaRPr>
                     </a:p>
                   </a:txBody>
                   <a:tcPr marL="7651" marR="7651" marT="7651" marB="0" anchor="ctr">
@@ -36667,13 +36445,10 @@
                       <a:pPr algn="ctr" fontAlgn="b">
                         <a:buNone/>
                       </a:pPr>
-                      <a:r>
-                        <a:rPr lang="es-MX" sz="1000" b="0" i="0" u="none" strike="noStrike" dirty="0">
-                          <a:effectLst/>
-                          <a:latin typeface="Montserrat" panose="00000500000000000000" pitchFamily="2" charset="0"/>
-                        </a:rPr>
-                        <a:t>90.0%</a:t>
-                      </a:r>
+                      <a:endParaRPr lang="es-MX" sz="1000" b="0" i="0" u="none" strike="noStrike" dirty="0">
+                        <a:effectLst/>
+                        <a:latin typeface="Montserrat" panose="00000500000000000000" pitchFamily="2" charset="0"/>
+                      </a:endParaRPr>
                     </a:p>
                   </a:txBody>
                   <a:tcPr marL="7651" marR="7651" marT="7651" marB="0" anchor="ctr">
@@ -36740,26 +36515,6 @@
                       <a:pPr algn="ctr" fontAlgn="b">
                         <a:buNone/>
                       </a:pPr>
-                      <a:r>
-                        <a:rPr lang="es-MX" sz="1000" b="0" i="0" u="none" strike="noStrike" dirty="0">
-                          <a:solidFill>
-                            <a:srgbClr val="00B050"/>
-                          </a:solidFill>
-                          <a:effectLst/>
-                          <a:latin typeface="Montserrat" panose="00000500000000000000" pitchFamily="2" charset="0"/>
-                        </a:rPr>
-                        <a:t>10.0 </a:t>
-                      </a:r>
-                      <a:r>
-                        <a:rPr lang="es-MX" sz="1000" b="0" i="0" u="none" strike="noStrike" dirty="0" err="1">
-                          <a:solidFill>
-                            <a:srgbClr val="00B050"/>
-                          </a:solidFill>
-                          <a:effectLst/>
-                          <a:latin typeface="Montserrat" panose="00000500000000000000" pitchFamily="2" charset="0"/>
-                        </a:rPr>
-                        <a:t>pp</a:t>
-                      </a:r>
                       <a:endParaRPr lang="es-MX" sz="1000" b="0" i="0" u="none" strike="noStrike" dirty="0">
                         <a:solidFill>
                           <a:srgbClr val="00B050"/>
@@ -37391,7 +37146,7 @@
           <p:nvPr>
             <p:extLst>
               <p:ext uri="{D42A27DB-BD31-4B8C-83A1-F6EECF244321}">
-                <p14:modId xmlns:p14="http://schemas.microsoft.com/office/powerpoint/2010/main" val="2476982570"/>
+                <p14:modId xmlns:p14="http://schemas.microsoft.com/office/powerpoint/2010/main" val="1003397433"/>
               </p:ext>
             </p:extLst>
           </p:nvPr>
@@ -38198,13 +37953,10 @@
                       <a:pPr algn="ctr" fontAlgn="b">
                         <a:buNone/>
                       </a:pPr>
-                      <a:r>
-                        <a:rPr lang="es-MX" sz="1000" b="1" i="0" u="none" strike="noStrike" dirty="0">
-                          <a:effectLst/>
-                          <a:latin typeface="Montserrat" panose="00000500000000000000" pitchFamily="2" charset="0"/>
-                        </a:rPr>
-                        <a:t>14</a:t>
-                      </a:r>
+                      <a:endParaRPr lang="es-MX" sz="1000" b="1" i="0" u="none" strike="noStrike" dirty="0">
+                        <a:effectLst/>
+                        <a:latin typeface="Montserrat" panose="00000500000000000000" pitchFamily="2" charset="0"/>
+                      </a:endParaRPr>
                     </a:p>
                   </a:txBody>
                   <a:tcPr marL="7620" marR="7620" marT="7620" marB="0" anchor="ctr">
@@ -38275,13 +38027,10 @@
                       <a:pPr algn="ctr" fontAlgn="b">
                         <a:buNone/>
                       </a:pPr>
-                      <a:r>
-                        <a:rPr lang="es-MX" sz="1000" b="1" i="0" u="none" strike="noStrike" dirty="0">
-                          <a:effectLst/>
-                          <a:latin typeface="Montserrat" panose="00000500000000000000" pitchFamily="2" charset="0"/>
-                        </a:rPr>
-                        <a:t>100.0%</a:t>
-                      </a:r>
+                      <a:endParaRPr lang="es-MX" sz="1000" b="1" i="0" u="none" strike="noStrike" dirty="0">
+                        <a:effectLst/>
+                        <a:latin typeface="Montserrat" panose="00000500000000000000" pitchFamily="2" charset="0"/>
+                      </a:endParaRPr>
                     </a:p>
                   </a:txBody>
                   <a:tcPr marL="7620" marR="7620" marT="7620" marB="0" anchor="ctr">
@@ -38352,13 +38101,10 @@
                       <a:pPr algn="ctr" fontAlgn="b">
                         <a:buNone/>
                       </a:pPr>
-                      <a:r>
-                        <a:rPr lang="es-MX" sz="1000" b="1" i="0" u="none" strike="noStrike" dirty="0">
-                          <a:effectLst/>
-                          <a:latin typeface="Montserrat" panose="00000500000000000000" pitchFamily="2" charset="0"/>
-                        </a:rPr>
-                        <a:t>90.0%</a:t>
-                      </a:r>
+                      <a:endParaRPr lang="es-MX" sz="1000" b="1" i="0" u="none" strike="noStrike" dirty="0">
+                        <a:effectLst/>
+                        <a:latin typeface="Montserrat" panose="00000500000000000000" pitchFamily="2" charset="0"/>
+                      </a:endParaRPr>
                     </a:p>
                   </a:txBody>
                   <a:tcPr marL="7620" marR="7620" marT="7620" marB="0" anchor="ctr">
@@ -38429,26 +38175,6 @@
                       <a:pPr algn="ctr" fontAlgn="b">
                         <a:buNone/>
                       </a:pPr>
-                      <a:r>
-                        <a:rPr lang="es-MX" sz="1000" b="1" i="0" u="none" strike="noStrike" dirty="0">
-                          <a:solidFill>
-                            <a:srgbClr val="00B050"/>
-                          </a:solidFill>
-                          <a:effectLst/>
-                          <a:latin typeface="Montserrat" panose="00000500000000000000" pitchFamily="2" charset="0"/>
-                        </a:rPr>
-                        <a:t>10.0 </a:t>
-                      </a:r>
-                      <a:r>
-                        <a:rPr lang="es-MX" sz="1000" b="1" i="0" u="none" strike="noStrike" dirty="0" err="1">
-                          <a:solidFill>
-                            <a:srgbClr val="00B050"/>
-                          </a:solidFill>
-                          <a:effectLst/>
-                          <a:latin typeface="Montserrat" panose="00000500000000000000" pitchFamily="2" charset="0"/>
-                        </a:rPr>
-                        <a:t>pp</a:t>
-                      </a:r>
                       <a:endParaRPr lang="es-MX" sz="1000" b="1" i="0" u="none" strike="noStrike" dirty="0">
                         <a:solidFill>
                           <a:srgbClr val="00B050"/>
@@ -38533,13 +38259,10 @@
                       <a:pPr algn="ctr" fontAlgn="b">
                         <a:buNone/>
                       </a:pPr>
-                      <a:r>
-                        <a:rPr lang="es-MX" sz="1000" b="0" i="0" u="none" strike="noStrike" dirty="0">
-                          <a:effectLst/>
-                          <a:latin typeface="Montserrat" panose="00000500000000000000" pitchFamily="2" charset="0"/>
-                        </a:rPr>
-                        <a:t>4</a:t>
-                      </a:r>
+                      <a:endParaRPr lang="es-MX" sz="1000" b="0" i="0" u="none" strike="noStrike" dirty="0">
+                        <a:effectLst/>
+                        <a:latin typeface="Montserrat" panose="00000500000000000000" pitchFamily="2" charset="0"/>
+                      </a:endParaRPr>
                     </a:p>
                   </a:txBody>
                   <a:tcPr marL="7620" marR="7620" marT="7620" marB="0" anchor="ctr">
@@ -38606,13 +38329,10 @@
                       <a:pPr algn="ctr" fontAlgn="b">
                         <a:buNone/>
                       </a:pPr>
-                      <a:r>
-                        <a:rPr lang="es-MX" sz="1000" b="1" i="0" u="none" strike="noStrike" dirty="0">
-                          <a:effectLst/>
-                          <a:latin typeface="Montserrat" panose="00000500000000000000" pitchFamily="2" charset="0"/>
-                        </a:rPr>
-                        <a:t>-</a:t>
-                      </a:r>
+                      <a:endParaRPr lang="es-MX" sz="1000" b="1" i="0" u="none" strike="noStrike" dirty="0">
+                        <a:effectLst/>
+                        <a:latin typeface="Montserrat" panose="00000500000000000000" pitchFamily="2" charset="0"/>
+                      </a:endParaRPr>
                     </a:p>
                   </a:txBody>
                   <a:tcPr marL="7620" marR="7620" marT="7620" marB="0" anchor="ctr">
@@ -38683,13 +38403,10 @@
                       <a:pPr algn="ctr" fontAlgn="b">
                         <a:buNone/>
                       </a:pPr>
-                      <a:r>
-                        <a:rPr lang="es-MX" sz="1000" b="0" i="0" u="none" strike="noStrike">
-                          <a:effectLst/>
-                          <a:latin typeface="Montserrat" panose="00000500000000000000" pitchFamily="2" charset="0"/>
-                        </a:rPr>
-                        <a:t>80.0%</a:t>
-                      </a:r>
+                      <a:endParaRPr lang="es-MX" sz="1000" b="0" i="0" u="none" strike="noStrike">
+                        <a:effectLst/>
+                        <a:latin typeface="Montserrat" panose="00000500000000000000" pitchFamily="2" charset="0"/>
+                      </a:endParaRPr>
                     </a:p>
                   </a:txBody>
                   <a:tcPr marL="7620" marR="7620" marT="7620" marB="0" anchor="ctr">
@@ -38770,13 +38487,10 @@
                         <a:tabLst/>
                         <a:defRPr/>
                       </a:pPr>
-                      <a:r>
-                        <a:rPr lang="es-MX" sz="1000" b="0" i="0" u="none" strike="noStrike" dirty="0">
-                          <a:effectLst/>
-                          <a:latin typeface="Montserrat" panose="00000500000000000000" pitchFamily="2" charset="0"/>
-                        </a:rPr>
-                        <a:t>-</a:t>
-                      </a:r>
+                      <a:endParaRPr lang="es-MX" sz="1000" b="0" i="0" u="none" strike="noStrike" dirty="0">
+                        <a:effectLst/>
+                        <a:latin typeface="Montserrat" panose="00000500000000000000" pitchFamily="2" charset="0"/>
+                      </a:endParaRPr>
                     </a:p>
                   </a:txBody>
                   <a:tcPr marL="7620" marR="7620" marT="7620" marB="0" anchor="ctr">
@@ -38850,13 +38564,10 @@
                       <a:pPr algn="ctr" fontAlgn="b">
                         <a:buNone/>
                       </a:pPr>
-                      <a:r>
-                        <a:rPr lang="es-MX" sz="1000" b="0" i="0" u="none" strike="noStrike">
-                          <a:effectLst/>
-                          <a:latin typeface="Montserrat" panose="00000500000000000000" pitchFamily="2" charset="0"/>
-                        </a:rPr>
-                        <a:t>3</a:t>
-                      </a:r>
+                      <a:endParaRPr lang="es-MX" sz="1000" b="0" i="0" u="none" strike="noStrike">
+                        <a:effectLst/>
+                        <a:latin typeface="Montserrat" panose="00000500000000000000" pitchFamily="2" charset="0"/>
+                      </a:endParaRPr>
                     </a:p>
                   </a:txBody>
                   <a:tcPr marL="7620" marR="7620" marT="7620" marB="0" anchor="ctr">
@@ -38923,13 +38634,10 @@
                       <a:pPr algn="ctr" fontAlgn="b">
                         <a:buNone/>
                       </a:pPr>
-                      <a:r>
-                        <a:rPr lang="es-MX" sz="1000" b="1" i="0" u="none" strike="noStrike" dirty="0">
-                          <a:effectLst/>
-                          <a:latin typeface="Montserrat" panose="00000500000000000000" pitchFamily="2" charset="0"/>
-                        </a:rPr>
-                        <a:t>*</a:t>
-                      </a:r>
+                      <a:endParaRPr lang="es-MX" sz="1000" b="1" i="0" u="none" strike="noStrike" dirty="0">
+                        <a:effectLst/>
+                        <a:latin typeface="Montserrat" panose="00000500000000000000" pitchFamily="2" charset="0"/>
+                      </a:endParaRPr>
                     </a:p>
                   </a:txBody>
                   <a:tcPr marL="7620" marR="7620" marT="7620" marB="0" anchor="ctr">
@@ -39000,13 +38708,10 @@
                       <a:pPr algn="ctr" fontAlgn="b">
                         <a:buNone/>
                       </a:pPr>
-                      <a:r>
-                        <a:rPr lang="es-MX" sz="1000" b="0" i="0" u="none" strike="noStrike" dirty="0">
-                          <a:effectLst/>
-                          <a:latin typeface="Montserrat" panose="00000500000000000000" pitchFamily="2" charset="0"/>
-                        </a:rPr>
-                        <a:t>-</a:t>
-                      </a:r>
+                      <a:endParaRPr lang="es-MX" sz="1000" b="0" i="0" u="none" strike="noStrike" dirty="0">
+                        <a:effectLst/>
+                        <a:latin typeface="Montserrat" panose="00000500000000000000" pitchFamily="2" charset="0"/>
+                      </a:endParaRPr>
                     </a:p>
                   </a:txBody>
                   <a:tcPr marL="7620" marR="7620" marT="7620" marB="0" anchor="ctr">
@@ -39087,13 +38792,10 @@
                         <a:tabLst/>
                         <a:defRPr/>
                       </a:pPr>
-                      <a:r>
-                        <a:rPr lang="es-MX" sz="1000" b="0" i="0" u="none" strike="noStrike" dirty="0">
-                          <a:effectLst/>
-                          <a:latin typeface="Montserrat" panose="00000500000000000000" pitchFamily="2" charset="0"/>
-                        </a:rPr>
-                        <a:t>-</a:t>
-                      </a:r>
+                      <a:endParaRPr lang="es-MX" sz="1000" b="0" i="0" u="none" strike="noStrike" dirty="0">
+                        <a:effectLst/>
+                        <a:latin typeface="Montserrat" panose="00000500000000000000" pitchFamily="2" charset="0"/>
+                      </a:endParaRPr>
                     </a:p>
                   </a:txBody>
                   <a:tcPr marL="7620" marR="7620" marT="7620" marB="0" anchor="ctr">
@@ -39167,13 +38869,10 @@
                       <a:pPr algn="ctr" fontAlgn="b">
                         <a:buNone/>
                       </a:pPr>
-                      <a:r>
-                        <a:rPr lang="es-MX" sz="1000" b="0" i="0" u="none" strike="noStrike">
-                          <a:effectLst/>
-                          <a:latin typeface="Montserrat" panose="00000500000000000000" pitchFamily="2" charset="0"/>
-                        </a:rPr>
-                        <a:t>2</a:t>
-                      </a:r>
+                      <a:endParaRPr lang="es-MX" sz="1000" b="0" i="0" u="none" strike="noStrike">
+                        <a:effectLst/>
+                        <a:latin typeface="Montserrat" panose="00000500000000000000" pitchFamily="2" charset="0"/>
+                      </a:endParaRPr>
                     </a:p>
                   </a:txBody>
                   <a:tcPr marL="7620" marR="7620" marT="7620" marB="0" anchor="ctr">
@@ -39240,13 +38939,10 @@
                       <a:pPr algn="ctr" fontAlgn="b">
                         <a:buNone/>
                       </a:pPr>
-                      <a:r>
-                        <a:rPr lang="es-MX" sz="1000" b="1" i="0" u="none" strike="noStrike" dirty="0">
-                          <a:effectLst/>
-                          <a:latin typeface="Montserrat" panose="00000500000000000000" pitchFamily="2" charset="0"/>
-                        </a:rPr>
-                        <a:t>*</a:t>
-                      </a:r>
+                      <a:endParaRPr lang="es-MX" sz="1000" b="1" i="0" u="none" strike="noStrike" dirty="0">
+                        <a:effectLst/>
+                        <a:latin typeface="Montserrat" panose="00000500000000000000" pitchFamily="2" charset="0"/>
+                      </a:endParaRPr>
                     </a:p>
                   </a:txBody>
                   <a:tcPr marL="7620" marR="7620" marT="7620" marB="0" anchor="ctr">
@@ -39317,13 +39013,10 @@
                       <a:pPr algn="ctr" fontAlgn="b">
                         <a:buNone/>
                       </a:pPr>
-                      <a:r>
-                        <a:rPr lang="es-MX" sz="1000" b="0" i="0" u="none" strike="noStrike" dirty="0">
-                          <a:effectLst/>
-                          <a:latin typeface="Montserrat" panose="00000500000000000000" pitchFamily="2" charset="0"/>
-                        </a:rPr>
-                        <a:t>-</a:t>
-                      </a:r>
+                      <a:endParaRPr lang="es-MX" sz="1000" b="0" i="0" u="none" strike="noStrike" dirty="0">
+                        <a:effectLst/>
+                        <a:latin typeface="Montserrat" panose="00000500000000000000" pitchFamily="2" charset="0"/>
+                      </a:endParaRPr>
                     </a:p>
                   </a:txBody>
                   <a:tcPr marL="7620" marR="7620" marT="7620" marB="0" anchor="ctr">
@@ -39404,13 +39097,10 @@
                         <a:tabLst/>
                         <a:defRPr/>
                       </a:pPr>
-                      <a:r>
-                        <a:rPr lang="es-MX" sz="1000" b="0" i="0" u="none" strike="noStrike" dirty="0">
-                          <a:effectLst/>
-                          <a:latin typeface="Montserrat" panose="00000500000000000000" pitchFamily="2" charset="0"/>
-                        </a:rPr>
-                        <a:t>-</a:t>
-                      </a:r>
+                      <a:endParaRPr lang="es-MX" sz="1000" b="0" i="0" u="none" strike="noStrike" dirty="0">
+                        <a:effectLst/>
+                        <a:latin typeface="Montserrat" panose="00000500000000000000" pitchFamily="2" charset="0"/>
+                      </a:endParaRPr>
                     </a:p>
                   </a:txBody>
                   <a:tcPr marL="7620" marR="7620" marT="7620" marB="0" anchor="ctr">
@@ -39484,13 +39174,10 @@
                       <a:pPr algn="ctr" fontAlgn="b">
                         <a:buNone/>
                       </a:pPr>
-                      <a:r>
-                        <a:rPr lang="es-MX" sz="1000" b="0" i="0" u="none" strike="noStrike">
-                          <a:effectLst/>
-                          <a:latin typeface="Montserrat" panose="00000500000000000000" pitchFamily="2" charset="0"/>
-                        </a:rPr>
-                        <a:t>2</a:t>
-                      </a:r>
+                      <a:endParaRPr lang="es-MX" sz="1000" b="0" i="0" u="none" strike="noStrike">
+                        <a:effectLst/>
+                        <a:latin typeface="Montserrat" panose="00000500000000000000" pitchFamily="2" charset="0"/>
+                      </a:endParaRPr>
                     </a:p>
                   </a:txBody>
                   <a:tcPr marL="7620" marR="7620" marT="7620" marB="0" anchor="ctr">
@@ -39557,13 +39244,10 @@
                       <a:pPr algn="ctr" fontAlgn="b">
                         <a:buNone/>
                       </a:pPr>
-                      <a:r>
-                        <a:rPr lang="es-MX" sz="1000" b="1" i="0" u="none" strike="noStrike" dirty="0">
-                          <a:effectLst/>
-                          <a:latin typeface="Montserrat" panose="00000500000000000000" pitchFamily="2" charset="0"/>
-                        </a:rPr>
-                        <a:t>*</a:t>
-                      </a:r>
+                      <a:endParaRPr lang="es-MX" sz="1000" b="1" i="0" u="none" strike="noStrike" dirty="0">
+                        <a:effectLst/>
+                        <a:latin typeface="Montserrat" panose="00000500000000000000" pitchFamily="2" charset="0"/>
+                      </a:endParaRPr>
                     </a:p>
                   </a:txBody>
                   <a:tcPr marL="7620" marR="7620" marT="7620" marB="0" anchor="ctr">
@@ -39634,13 +39318,10 @@
                       <a:pPr algn="ctr" fontAlgn="b">
                         <a:buNone/>
                       </a:pPr>
-                      <a:r>
-                        <a:rPr lang="es-MX" sz="1000" b="0" i="0" u="none" strike="noStrike" dirty="0">
-                          <a:effectLst/>
-                          <a:latin typeface="Montserrat" panose="00000500000000000000" pitchFamily="2" charset="0"/>
-                        </a:rPr>
-                        <a:t>-</a:t>
-                      </a:r>
+                      <a:endParaRPr lang="es-MX" sz="1000" b="0" i="0" u="none" strike="noStrike" dirty="0">
+                        <a:effectLst/>
+                        <a:latin typeface="Montserrat" panose="00000500000000000000" pitchFamily="2" charset="0"/>
+                      </a:endParaRPr>
                     </a:p>
                   </a:txBody>
                   <a:tcPr marL="7620" marR="7620" marT="7620" marB="0" anchor="ctr">
@@ -39721,13 +39402,10 @@
                         <a:tabLst/>
                         <a:defRPr/>
                       </a:pPr>
-                      <a:r>
-                        <a:rPr lang="es-MX" sz="1000" b="0" i="0" u="none" strike="noStrike" dirty="0">
-                          <a:effectLst/>
-                          <a:latin typeface="Montserrat" panose="00000500000000000000" pitchFamily="2" charset="0"/>
-                        </a:rPr>
-                        <a:t>-</a:t>
-                      </a:r>
+                      <a:endParaRPr lang="es-MX" sz="1000" b="0" i="0" u="none" strike="noStrike" dirty="0">
+                        <a:effectLst/>
+                        <a:latin typeface="Montserrat" panose="00000500000000000000" pitchFamily="2" charset="0"/>
+                      </a:endParaRPr>
                     </a:p>
                   </a:txBody>
                   <a:tcPr marL="7620" marR="7620" marT="7620" marB="0" anchor="ctr">
@@ -39801,13 +39479,10 @@
                       <a:pPr algn="ctr" fontAlgn="b">
                         <a:buNone/>
                       </a:pPr>
-                      <a:r>
-                        <a:rPr lang="es-MX" sz="1000" b="0" i="0" u="none" strike="noStrike">
-                          <a:effectLst/>
-                          <a:latin typeface="Montserrat" panose="00000500000000000000" pitchFamily="2" charset="0"/>
-                        </a:rPr>
-                        <a:t>1</a:t>
-                      </a:r>
+                      <a:endParaRPr lang="es-MX" sz="1000" b="0" i="0" u="none" strike="noStrike">
+                        <a:effectLst/>
+                        <a:latin typeface="Montserrat" panose="00000500000000000000" pitchFamily="2" charset="0"/>
+                      </a:endParaRPr>
                     </a:p>
                   </a:txBody>
                   <a:tcPr marL="7620" marR="7620" marT="7620" marB="0" anchor="ctr">
@@ -39874,13 +39549,10 @@
                       <a:pPr algn="ctr" fontAlgn="b">
                         <a:buNone/>
                       </a:pPr>
-                      <a:r>
-                        <a:rPr lang="es-MX" sz="1000" b="1" i="0" u="none" strike="noStrike" dirty="0">
-                          <a:effectLst/>
-                          <a:latin typeface="Montserrat" panose="00000500000000000000" pitchFamily="2" charset="0"/>
-                        </a:rPr>
-                        <a:t>*</a:t>
-                      </a:r>
+                      <a:endParaRPr lang="es-MX" sz="1000" b="1" i="0" u="none" strike="noStrike" dirty="0">
+                        <a:effectLst/>
+                        <a:latin typeface="Montserrat" panose="00000500000000000000" pitchFamily="2" charset="0"/>
+                      </a:endParaRPr>
                     </a:p>
                   </a:txBody>
                   <a:tcPr marL="7620" marR="7620" marT="7620" marB="0" anchor="ctr">
@@ -39951,13 +39623,10 @@
                       <a:pPr algn="ctr" fontAlgn="b">
                         <a:buNone/>
                       </a:pPr>
-                      <a:r>
-                        <a:rPr lang="es-MX" sz="1000" b="0" i="0" u="none" strike="noStrike" dirty="0">
-                          <a:effectLst/>
-                          <a:latin typeface="Montserrat" panose="00000500000000000000" pitchFamily="2" charset="0"/>
-                        </a:rPr>
-                        <a:t>-</a:t>
-                      </a:r>
+                      <a:endParaRPr lang="es-MX" sz="1000" b="0" i="0" u="none" strike="noStrike" dirty="0">
+                        <a:effectLst/>
+                        <a:latin typeface="Montserrat" panose="00000500000000000000" pitchFamily="2" charset="0"/>
+                      </a:endParaRPr>
                     </a:p>
                   </a:txBody>
                   <a:tcPr marL="7620" marR="7620" marT="7620" marB="0" anchor="ctr">
@@ -40038,13 +39707,10 @@
                         <a:tabLst/>
                         <a:defRPr/>
                       </a:pPr>
-                      <a:r>
-                        <a:rPr lang="es-MX" sz="1000" b="0" i="0" u="none" strike="noStrike" dirty="0">
-                          <a:effectLst/>
-                          <a:latin typeface="Montserrat" panose="00000500000000000000" pitchFamily="2" charset="0"/>
-                        </a:rPr>
-                        <a:t>-</a:t>
-                      </a:r>
+                      <a:endParaRPr lang="es-MX" sz="1000" b="0" i="0" u="none" strike="noStrike" dirty="0">
+                        <a:effectLst/>
+                        <a:latin typeface="Montserrat" panose="00000500000000000000" pitchFamily="2" charset="0"/>
+                      </a:endParaRPr>
                     </a:p>
                   </a:txBody>
                   <a:tcPr marL="7620" marR="7620" marT="7620" marB="0" anchor="ctr">
@@ -40118,13 +39784,10 @@
                       <a:pPr algn="ctr" fontAlgn="b">
                         <a:buNone/>
                       </a:pPr>
-                      <a:r>
-                        <a:rPr lang="es-MX" sz="1000" b="0" i="0" u="none" strike="noStrike">
-                          <a:effectLst/>
-                          <a:latin typeface="Montserrat" panose="00000500000000000000" pitchFamily="2" charset="0"/>
-                        </a:rPr>
-                        <a:t>1</a:t>
-                      </a:r>
+                      <a:endParaRPr lang="es-MX" sz="1000" b="0" i="0" u="none" strike="noStrike">
+                        <a:effectLst/>
+                        <a:latin typeface="Montserrat" panose="00000500000000000000" pitchFamily="2" charset="0"/>
+                      </a:endParaRPr>
                     </a:p>
                   </a:txBody>
                   <a:tcPr marL="7620" marR="7620" marT="7620" marB="0" anchor="ctr">
@@ -40191,13 +39854,10 @@
                       <a:pPr algn="ctr" fontAlgn="b">
                         <a:buNone/>
                       </a:pPr>
-                      <a:r>
-                        <a:rPr lang="es-MX" sz="1000" b="1" i="0" u="none" strike="noStrike" dirty="0">
-                          <a:effectLst/>
-                          <a:latin typeface="Montserrat" panose="00000500000000000000" pitchFamily="2" charset="0"/>
-                        </a:rPr>
-                        <a:t>*</a:t>
-                      </a:r>
+                      <a:endParaRPr lang="es-MX" sz="1000" b="1" i="0" u="none" strike="noStrike" dirty="0">
+                        <a:effectLst/>
+                        <a:latin typeface="Montserrat" panose="00000500000000000000" pitchFamily="2" charset="0"/>
+                      </a:endParaRPr>
                     </a:p>
                   </a:txBody>
                   <a:tcPr marL="7620" marR="7620" marT="7620" marB="0" anchor="ctr">
@@ -40268,13 +39928,10 @@
                       <a:pPr algn="ctr" fontAlgn="b">
                         <a:buNone/>
                       </a:pPr>
-                      <a:r>
-                        <a:rPr lang="es-MX" sz="1000" b="0" i="0" u="none" strike="noStrike" dirty="0">
-                          <a:effectLst/>
-                          <a:latin typeface="Montserrat" panose="00000500000000000000" pitchFamily="2" charset="0"/>
-                        </a:rPr>
-                        <a:t>-</a:t>
-                      </a:r>
+                      <a:endParaRPr lang="es-MX" sz="1000" b="0" i="0" u="none" strike="noStrike" dirty="0">
+                        <a:effectLst/>
+                        <a:latin typeface="Montserrat" panose="00000500000000000000" pitchFamily="2" charset="0"/>
+                      </a:endParaRPr>
                     </a:p>
                   </a:txBody>
                   <a:tcPr marL="7620" marR="7620" marT="7620" marB="0" anchor="ctr">
@@ -40355,13 +40012,10 @@
                         <a:tabLst/>
                         <a:defRPr/>
                       </a:pPr>
-                      <a:r>
-                        <a:rPr lang="es-MX" sz="1000" b="0" i="0" u="none" strike="noStrike" dirty="0">
-                          <a:effectLst/>
-                          <a:latin typeface="Montserrat" panose="00000500000000000000" pitchFamily="2" charset="0"/>
-                        </a:rPr>
-                        <a:t>-</a:t>
-                      </a:r>
+                      <a:endParaRPr lang="es-MX" sz="1000" b="0" i="0" u="none" strike="noStrike" dirty="0">
+                        <a:effectLst/>
+                        <a:latin typeface="Montserrat" panose="00000500000000000000" pitchFamily="2" charset="0"/>
+                      </a:endParaRPr>
                     </a:p>
                   </a:txBody>
                   <a:tcPr marL="7620" marR="7620" marT="7620" marB="0" anchor="ctr">
@@ -40435,13 +40089,10 @@
                       <a:pPr algn="ctr" fontAlgn="b">
                         <a:buNone/>
                       </a:pPr>
-                      <a:r>
-                        <a:rPr lang="es-MX" sz="1000" b="0" i="0" u="none" strike="noStrike" dirty="0">
-                          <a:effectLst/>
-                          <a:latin typeface="Montserrat" panose="00000500000000000000" pitchFamily="2" charset="0"/>
-                        </a:rPr>
-                        <a:t>1</a:t>
-                      </a:r>
+                      <a:endParaRPr lang="es-MX" sz="1000" b="0" i="0" u="none" strike="noStrike" dirty="0">
+                        <a:effectLst/>
+                        <a:latin typeface="Montserrat" panose="00000500000000000000" pitchFamily="2" charset="0"/>
+                      </a:endParaRPr>
                     </a:p>
                   </a:txBody>
                   <a:tcPr marL="7620" marR="7620" marT="7620" marB="0" anchor="ctr">
@@ -40508,13 +40159,10 @@
                       <a:pPr algn="ctr" fontAlgn="b">
                         <a:buNone/>
                       </a:pPr>
-                      <a:r>
-                        <a:rPr lang="es-MX" sz="1000" b="1" i="0" u="none" strike="noStrike" dirty="0">
-                          <a:effectLst/>
-                          <a:latin typeface="Montserrat" panose="00000500000000000000" pitchFamily="2" charset="0"/>
-                        </a:rPr>
-                        <a:t>*</a:t>
-                      </a:r>
+                      <a:endParaRPr lang="es-MX" sz="1000" b="1" i="0" u="none" strike="noStrike" dirty="0">
+                        <a:effectLst/>
+                        <a:latin typeface="Montserrat" panose="00000500000000000000" pitchFamily="2" charset="0"/>
+                      </a:endParaRPr>
                     </a:p>
                   </a:txBody>
                   <a:tcPr marL="7620" marR="7620" marT="7620" marB="0" anchor="ctr">
@@ -40585,13 +40233,10 @@
                       <a:pPr algn="ctr" fontAlgn="b">
                         <a:buNone/>
                       </a:pPr>
-                      <a:r>
-                        <a:rPr lang="es-MX" sz="1000" b="0" i="0" u="none" strike="noStrike" dirty="0">
-                          <a:effectLst/>
-                          <a:latin typeface="Montserrat" panose="00000500000000000000" pitchFamily="2" charset="0"/>
-                        </a:rPr>
-                        <a:t>-</a:t>
-                      </a:r>
+                      <a:endParaRPr lang="es-MX" sz="1000" b="0" i="0" u="none" strike="noStrike" dirty="0">
+                        <a:effectLst/>
+                        <a:latin typeface="Montserrat" panose="00000500000000000000" pitchFamily="2" charset="0"/>
+                      </a:endParaRPr>
                     </a:p>
                   </a:txBody>
                   <a:tcPr marL="7620" marR="7620" marT="7620" marB="0" anchor="ctr">
@@ -40672,13 +40317,10 @@
                         <a:tabLst/>
                         <a:defRPr/>
                       </a:pPr>
-                      <a:r>
-                        <a:rPr lang="es-MX" sz="1000" b="0" i="0" u="none" strike="noStrike" dirty="0">
-                          <a:effectLst/>
-                          <a:latin typeface="Montserrat" panose="00000500000000000000" pitchFamily="2" charset="0"/>
-                        </a:rPr>
-                        <a:t>-</a:t>
-                      </a:r>
+                      <a:endParaRPr lang="es-MX" sz="1000" b="0" i="0" u="none" strike="noStrike" dirty="0">
+                        <a:effectLst/>
+                        <a:latin typeface="Montserrat" panose="00000500000000000000" pitchFamily="2" charset="0"/>
+                      </a:endParaRPr>
                     </a:p>
                   </a:txBody>
                   <a:tcPr marL="7620" marR="7620" marT="7620" marB="0" anchor="ctr">
@@ -43146,7 +42788,7 @@
           <p:nvPr>
             <p:extLst>
               <p:ext uri="{D42A27DB-BD31-4B8C-83A1-F6EECF244321}">
-                <p14:modId xmlns:p14="http://schemas.microsoft.com/office/powerpoint/2010/main" val="2567778589"/>
+                <p14:modId xmlns:p14="http://schemas.microsoft.com/office/powerpoint/2010/main" val="1591899295"/>
               </p:ext>
             </p:extLst>
           </p:nvPr>
@@ -44625,7 +44267,7 @@
           <p:nvPr>
             <p:extLst>
               <p:ext uri="{D42A27DB-BD31-4B8C-83A1-F6EECF244321}">
-                <p14:modId xmlns:p14="http://schemas.microsoft.com/office/powerpoint/2010/main" val="518774290"/>
+                <p14:modId xmlns:p14="http://schemas.microsoft.com/office/powerpoint/2010/main" val="1951512122"/>
               </p:ext>
             </p:extLst>
           </p:nvPr>
@@ -44883,16 +44525,13 @@
                       <a:pPr algn="l" fontAlgn="b">
                         <a:buNone/>
                       </a:pPr>
-                      <a:r>
-                        <a:rPr lang="es-MX" sz="1400" b="0" i="0" u="none" strike="noStrike" dirty="0">
-                          <a:solidFill>
-                            <a:srgbClr val="00B050"/>
-                          </a:solidFill>
-                          <a:effectLst/>
-                          <a:latin typeface="Montserrat" panose="00000500000000000000" pitchFamily="2" charset="0"/>
-                        </a:rPr>
-                        <a:t>La empresa me permite aprender y crecer</a:t>
-                      </a:r>
+                      <a:endParaRPr lang="es-MX" sz="1400" b="0" i="0" u="none" strike="noStrike" dirty="0">
+                        <a:solidFill>
+                          <a:srgbClr val="00B050"/>
+                        </a:solidFill>
+                        <a:effectLst/>
+                        <a:latin typeface="Montserrat" panose="00000500000000000000" pitchFamily="2" charset="0"/>
+                      </a:endParaRPr>
                     </a:p>
                   </a:txBody>
                   <a:tcPr marL="7620" marR="7620" marT="7620" marB="0" anchor="ctr">
@@ -44950,16 +44589,13 @@
                       <a:pPr algn="ctr" fontAlgn="b">
                         <a:buNone/>
                       </a:pPr>
-                      <a:r>
-                        <a:rPr lang="es-MX" sz="1400" b="1" i="0" u="none" strike="noStrike" dirty="0">
-                          <a:solidFill>
-                            <a:srgbClr val="00B050"/>
-                          </a:solidFill>
-                          <a:effectLst/>
-                          <a:latin typeface="Montserrat" panose="00000500000000000000" pitchFamily="2" charset="0"/>
-                        </a:rPr>
-                        <a:t>8</a:t>
-                      </a:r>
+                      <a:endParaRPr lang="es-MX" sz="1400" b="1" i="0" u="none" strike="noStrike" dirty="0">
+                        <a:solidFill>
+                          <a:srgbClr val="00B050"/>
+                        </a:solidFill>
+                        <a:effectLst/>
+                        <a:latin typeface="Montserrat" panose="00000500000000000000" pitchFamily="2" charset="0"/>
+                      </a:endParaRPr>
                     </a:p>
                   </a:txBody>
                   <a:tcPr marL="7620" marR="7620" marT="7620" marB="0" anchor="ctr">
@@ -45018,20 +44654,17 @@
                       <a:pPr marL="0" algn="ctr" defTabSz="609555" rtl="0" eaLnBrk="1" fontAlgn="b" latinLnBrk="0" hangingPunct="1">
                         <a:buNone/>
                       </a:pPr>
-                      <a:r>
-                        <a:rPr lang="es-MX" sz="1400" b="1" i="0" u="none" strike="noStrike" kern="1200" dirty="0">
-                          <a:solidFill>
-                            <a:schemeClr val="bg1">
-                              <a:lumMod val="65000"/>
-                            </a:schemeClr>
-                          </a:solidFill>
-                          <a:effectLst/>
-                          <a:latin typeface="Montserrat" panose="00000500000000000000" pitchFamily="2" charset="0"/>
-                          <a:ea typeface="+mn-ea"/>
-                          <a:cs typeface="Calibri" panose="020F0502020204030204" pitchFamily="34" charset="0"/>
-                        </a:rPr>
-                        <a:t>Desarrollo y crecimiento</a:t>
-                      </a:r>
+                      <a:endParaRPr lang="es-MX" sz="1400" b="1" i="0" u="none" strike="noStrike" kern="1200" dirty="0">
+                        <a:solidFill>
+                          <a:schemeClr val="bg1">
+                            <a:lumMod val="65000"/>
+                          </a:schemeClr>
+                        </a:solidFill>
+                        <a:effectLst/>
+                        <a:latin typeface="Montserrat" panose="00000500000000000000" pitchFamily="2" charset="0"/>
+                        <a:ea typeface="+mn-ea"/>
+                        <a:cs typeface="Calibri" panose="020F0502020204030204" pitchFamily="34" charset="0"/>
+                      </a:endParaRPr>
                     </a:p>
                   </a:txBody>
                   <a:tcPr marL="7620" marR="7620" marT="7620" marB="0" anchor="ctr">
@@ -45097,16 +44730,13 @@
                       <a:pPr algn="l" fontAlgn="b">
                         <a:buNone/>
                       </a:pPr>
-                      <a:r>
-                        <a:rPr lang="es-MX" sz="1400" b="0" i="0" u="none" strike="noStrike" dirty="0">
-                          <a:solidFill>
-                            <a:srgbClr val="00B050"/>
-                          </a:solidFill>
-                          <a:effectLst/>
-                          <a:latin typeface="Montserrat" panose="00000500000000000000" pitchFamily="2" charset="0"/>
-                        </a:rPr>
-                        <a:t>Estoy orgulloso de pertenecer al grupo /Es una buena empresa /recomendable</a:t>
-                      </a:r>
+                      <a:endParaRPr lang="es-MX" sz="1400" b="0" i="0" u="none" strike="noStrike" dirty="0">
+                        <a:solidFill>
+                          <a:srgbClr val="00B050"/>
+                        </a:solidFill>
+                        <a:effectLst/>
+                        <a:latin typeface="Montserrat" panose="00000500000000000000" pitchFamily="2" charset="0"/>
+                      </a:endParaRPr>
                     </a:p>
                   </a:txBody>
                   <a:tcPr marL="7620" marR="7620" marT="7620" marB="0" anchor="ctr">
@@ -45164,16 +44794,13 @@
                       <a:pPr algn="ctr" fontAlgn="b">
                         <a:buNone/>
                       </a:pPr>
-                      <a:r>
-                        <a:rPr lang="es-MX" sz="1400" b="1" i="0" u="none" strike="noStrike" dirty="0">
-                          <a:solidFill>
-                            <a:srgbClr val="00B050"/>
-                          </a:solidFill>
-                          <a:effectLst/>
-                          <a:latin typeface="Montserrat" panose="00000500000000000000" pitchFamily="2" charset="0"/>
-                        </a:rPr>
-                        <a:t>3</a:t>
-                      </a:r>
+                      <a:endParaRPr lang="es-MX" sz="1400" b="1" i="0" u="none" strike="noStrike" dirty="0">
+                        <a:solidFill>
+                          <a:srgbClr val="00B050"/>
+                        </a:solidFill>
+                        <a:effectLst/>
+                        <a:latin typeface="Montserrat" panose="00000500000000000000" pitchFamily="2" charset="0"/>
+                      </a:endParaRPr>
                     </a:p>
                   </a:txBody>
                   <a:tcPr marL="7620" marR="7620" marT="7620" marB="0" anchor="ctr">
@@ -45232,20 +44859,17 @@
                       <a:pPr marL="0" algn="ctr" defTabSz="609555" rtl="0" eaLnBrk="1" fontAlgn="b" latinLnBrk="0" hangingPunct="1">
                         <a:buNone/>
                       </a:pPr>
-                      <a:r>
-                        <a:rPr lang="es-MX" sz="1400" b="1" i="0" u="none" strike="noStrike" kern="1200" dirty="0">
-                          <a:solidFill>
-                            <a:schemeClr val="bg1">
-                              <a:lumMod val="65000"/>
-                            </a:schemeClr>
-                          </a:solidFill>
-                          <a:effectLst/>
-                          <a:latin typeface="Montserrat" panose="00000500000000000000" pitchFamily="2" charset="0"/>
-                          <a:ea typeface="+mn-ea"/>
-                          <a:cs typeface="Calibri" panose="020F0502020204030204" pitchFamily="34" charset="0"/>
-                        </a:rPr>
-                        <a:t>Imagen de la empresa</a:t>
-                      </a:r>
+                      <a:endParaRPr lang="es-MX" sz="1400" b="1" i="0" u="none" strike="noStrike" kern="1200" dirty="0">
+                        <a:solidFill>
+                          <a:schemeClr val="bg1">
+                            <a:lumMod val="65000"/>
+                          </a:schemeClr>
+                        </a:solidFill>
+                        <a:effectLst/>
+                        <a:latin typeface="Montserrat" panose="00000500000000000000" pitchFamily="2" charset="0"/>
+                        <a:ea typeface="+mn-ea"/>
+                        <a:cs typeface="Calibri" panose="020F0502020204030204" pitchFamily="34" charset="0"/>
+                      </a:endParaRPr>
                     </a:p>
                   </a:txBody>
                   <a:tcPr marL="7620" marR="7620" marT="7620" marB="0" anchor="ctr">
@@ -45311,16 +44935,13 @@
                       <a:pPr algn="l" fontAlgn="b">
                         <a:buNone/>
                       </a:pPr>
-                      <a:r>
-                        <a:rPr lang="es-MX" sz="1400" b="0" i="0" u="none" strike="noStrike" dirty="0">
-                          <a:solidFill>
-                            <a:srgbClr val="00B050"/>
-                          </a:solidFill>
-                          <a:effectLst/>
-                          <a:latin typeface="Montserrat" panose="00000500000000000000" pitchFamily="2" charset="0"/>
-                        </a:rPr>
-                        <a:t>La empresa me da estabilidad (laboral/económica)</a:t>
-                      </a:r>
+                      <a:endParaRPr lang="es-MX" sz="1400" b="0" i="0" u="none" strike="noStrike" dirty="0">
+                        <a:solidFill>
+                          <a:srgbClr val="00B050"/>
+                        </a:solidFill>
+                        <a:effectLst/>
+                        <a:latin typeface="Montserrat" panose="00000500000000000000" pitchFamily="2" charset="0"/>
+                      </a:endParaRPr>
                     </a:p>
                   </a:txBody>
                   <a:tcPr marL="7620" marR="7620" marT="7620" marB="0" anchor="ctr">
@@ -45378,16 +44999,13 @@
                       <a:pPr algn="ctr" fontAlgn="b">
                         <a:buNone/>
                       </a:pPr>
-                      <a:r>
-                        <a:rPr lang="es-MX" sz="1400" b="1" i="0" u="none" strike="noStrike" dirty="0">
-                          <a:solidFill>
-                            <a:srgbClr val="00B050"/>
-                          </a:solidFill>
-                          <a:effectLst/>
-                          <a:latin typeface="Montserrat" panose="00000500000000000000" pitchFamily="2" charset="0"/>
-                        </a:rPr>
-                        <a:t>2</a:t>
-                      </a:r>
+                      <a:endParaRPr lang="es-MX" sz="1400" b="1" i="0" u="none" strike="noStrike" dirty="0">
+                        <a:solidFill>
+                          <a:srgbClr val="00B050"/>
+                        </a:solidFill>
+                        <a:effectLst/>
+                        <a:latin typeface="Montserrat" panose="00000500000000000000" pitchFamily="2" charset="0"/>
+                      </a:endParaRPr>
                     </a:p>
                   </a:txBody>
                   <a:tcPr marL="7620" marR="7620" marT="7620" marB="0" anchor="ctr">
@@ -45446,20 +45064,17 @@
                       <a:pPr marL="0" algn="ctr" defTabSz="609555" rtl="0" eaLnBrk="1" fontAlgn="b" latinLnBrk="0" hangingPunct="1">
                         <a:buNone/>
                       </a:pPr>
-                      <a:r>
-                        <a:rPr lang="es-MX" sz="1400" b="1" i="0" u="none" strike="noStrike" kern="1200">
-                          <a:solidFill>
-                            <a:schemeClr val="bg1">
-                              <a:lumMod val="65000"/>
-                            </a:schemeClr>
-                          </a:solidFill>
-                          <a:effectLst/>
-                          <a:latin typeface="Montserrat" panose="00000500000000000000" pitchFamily="2" charset="0"/>
-                          <a:ea typeface="+mn-ea"/>
-                          <a:cs typeface="Calibri" panose="020F0502020204030204" pitchFamily="34" charset="0"/>
-                        </a:rPr>
-                        <a:t>Compensación</a:t>
-                      </a:r>
+                      <a:endParaRPr lang="es-MX" sz="1400" b="1" i="0" u="none" strike="noStrike" kern="1200">
+                        <a:solidFill>
+                          <a:schemeClr val="bg1">
+                            <a:lumMod val="65000"/>
+                          </a:schemeClr>
+                        </a:solidFill>
+                        <a:effectLst/>
+                        <a:latin typeface="Montserrat" panose="00000500000000000000" pitchFamily="2" charset="0"/>
+                        <a:ea typeface="+mn-ea"/>
+                        <a:cs typeface="Calibri" panose="020F0502020204030204" pitchFamily="34" charset="0"/>
+                      </a:endParaRPr>
                     </a:p>
                   </a:txBody>
                   <a:tcPr marL="7620" marR="7620" marT="7620" marB="0" anchor="ctr">
@@ -45525,16 +45140,13 @@
                       <a:pPr algn="l" fontAlgn="b">
                         <a:buNone/>
                       </a:pPr>
-                      <a:r>
-                        <a:rPr lang="es-MX" sz="1400" b="0" i="0" u="none" strike="noStrike" dirty="0">
-                          <a:solidFill>
-                            <a:srgbClr val="00B050"/>
-                          </a:solidFill>
-                          <a:effectLst/>
-                          <a:latin typeface="Montserrat" panose="00000500000000000000" pitchFamily="2" charset="0"/>
-                        </a:rPr>
-                        <a:t>Hay buen ambiente de trabajo</a:t>
-                      </a:r>
+                      <a:endParaRPr lang="es-MX" sz="1400" b="0" i="0" u="none" strike="noStrike" dirty="0">
+                        <a:solidFill>
+                          <a:srgbClr val="00B050"/>
+                        </a:solidFill>
+                        <a:effectLst/>
+                        <a:latin typeface="Montserrat" panose="00000500000000000000" pitchFamily="2" charset="0"/>
+                      </a:endParaRPr>
                     </a:p>
                   </a:txBody>
                   <a:tcPr marL="7620" marR="7620" marT="7620" marB="0" anchor="ctr">
@@ -45592,16 +45204,13 @@
                       <a:pPr algn="ctr" fontAlgn="b">
                         <a:buNone/>
                       </a:pPr>
-                      <a:r>
-                        <a:rPr lang="es-MX" sz="1400" b="1" i="0" u="none" strike="noStrike" dirty="0">
-                          <a:solidFill>
-                            <a:srgbClr val="00B050"/>
-                          </a:solidFill>
-                          <a:effectLst/>
-                          <a:latin typeface="Montserrat" panose="00000500000000000000" pitchFamily="2" charset="0"/>
-                        </a:rPr>
-                        <a:t>1</a:t>
-                      </a:r>
+                      <a:endParaRPr lang="es-MX" sz="1400" b="1" i="0" u="none" strike="noStrike" dirty="0">
+                        <a:solidFill>
+                          <a:srgbClr val="00B050"/>
+                        </a:solidFill>
+                        <a:effectLst/>
+                        <a:latin typeface="Montserrat" panose="00000500000000000000" pitchFamily="2" charset="0"/>
+                      </a:endParaRPr>
                     </a:p>
                   </a:txBody>
                   <a:tcPr marL="7620" marR="7620" marT="7620" marB="0" anchor="ctr">
@@ -45660,20 +45269,17 @@
                       <a:pPr marL="0" algn="ctr" defTabSz="609555" rtl="0" eaLnBrk="1" fontAlgn="b" latinLnBrk="0" hangingPunct="1">
                         <a:buNone/>
                       </a:pPr>
-                      <a:r>
-                        <a:rPr lang="es-MX" sz="1400" b="1" i="0" u="none" strike="noStrike" kern="1200" dirty="0">
-                          <a:solidFill>
-                            <a:schemeClr val="bg1">
-                              <a:lumMod val="65000"/>
-                            </a:schemeClr>
-                          </a:solidFill>
-                          <a:effectLst/>
-                          <a:latin typeface="Montserrat" panose="00000500000000000000" pitchFamily="2" charset="0"/>
-                          <a:ea typeface="+mn-ea"/>
-                          <a:cs typeface="Calibri" panose="020F0502020204030204" pitchFamily="34" charset="0"/>
-                        </a:rPr>
-                        <a:t>Ambiente laboral</a:t>
-                      </a:r>
+                      <a:endParaRPr lang="es-MX" sz="1400" b="1" i="0" u="none" strike="noStrike" kern="1200" dirty="0">
+                        <a:solidFill>
+                          <a:schemeClr val="bg1">
+                            <a:lumMod val="65000"/>
+                          </a:schemeClr>
+                        </a:solidFill>
+                        <a:effectLst/>
+                        <a:latin typeface="Montserrat" panose="00000500000000000000" pitchFamily="2" charset="0"/>
+                        <a:ea typeface="+mn-ea"/>
+                        <a:cs typeface="Calibri" panose="020F0502020204030204" pitchFamily="34" charset="0"/>
+                      </a:endParaRPr>
                     </a:p>
                   </a:txBody>
                   <a:tcPr marL="7620" marR="7620" marT="7620" marB="0" anchor="ctr">
@@ -45739,16 +45345,13 @@
                       <a:pPr algn="l" fontAlgn="b">
                         <a:buNone/>
                       </a:pPr>
-                      <a:r>
-                        <a:rPr lang="es-MX" sz="1400" b="0" i="0" u="none" strike="noStrike" dirty="0">
-                          <a:solidFill>
-                            <a:srgbClr val="00B050"/>
-                          </a:solidFill>
-                          <a:effectLst/>
-                          <a:latin typeface="Montserrat" panose="00000500000000000000" pitchFamily="2" charset="0"/>
-                        </a:rPr>
-                        <a:t>La empresa me ayuda a mejorar mi calidad de vida y la de mi familia</a:t>
-                      </a:r>
+                      <a:endParaRPr lang="es-MX" sz="1400" b="0" i="0" u="none" strike="noStrike" dirty="0">
+                        <a:solidFill>
+                          <a:srgbClr val="00B050"/>
+                        </a:solidFill>
+                        <a:effectLst/>
+                        <a:latin typeface="Montserrat" panose="00000500000000000000" pitchFamily="2" charset="0"/>
+                      </a:endParaRPr>
                     </a:p>
                   </a:txBody>
                   <a:tcPr marL="7620" marR="7620" marT="7620" marB="0" anchor="ctr">
@@ -45806,16 +45409,13 @@
                       <a:pPr algn="ctr" fontAlgn="b">
                         <a:buNone/>
                       </a:pPr>
-                      <a:r>
-                        <a:rPr lang="es-MX" sz="1400" b="1" i="0" u="none" strike="noStrike" dirty="0">
-                          <a:solidFill>
-                            <a:srgbClr val="00B050"/>
-                          </a:solidFill>
-                          <a:effectLst/>
-                          <a:latin typeface="Montserrat" panose="00000500000000000000" pitchFamily="2" charset="0"/>
-                        </a:rPr>
-                        <a:t>1</a:t>
-                      </a:r>
+                      <a:endParaRPr lang="es-MX" sz="1400" b="1" i="0" u="none" strike="noStrike" dirty="0">
+                        <a:solidFill>
+                          <a:srgbClr val="00B050"/>
+                        </a:solidFill>
+                        <a:effectLst/>
+                        <a:latin typeface="Montserrat" panose="00000500000000000000" pitchFamily="2" charset="0"/>
+                      </a:endParaRPr>
                     </a:p>
                   </a:txBody>
                   <a:tcPr marL="7620" marR="7620" marT="7620" marB="0" anchor="ctr">
@@ -45874,20 +45474,17 @@
                       <a:pPr marL="0" algn="ctr" defTabSz="609555" rtl="0" eaLnBrk="1" fontAlgn="b" latinLnBrk="0" hangingPunct="1">
                         <a:buNone/>
                       </a:pPr>
-                      <a:r>
-                        <a:rPr lang="es-MX" sz="1400" b="1" i="0" u="none" strike="noStrike" kern="1200">
-                          <a:solidFill>
-                            <a:schemeClr val="bg1">
-                              <a:lumMod val="65000"/>
-                            </a:schemeClr>
-                          </a:solidFill>
-                          <a:effectLst/>
-                          <a:latin typeface="Montserrat" panose="00000500000000000000" pitchFamily="2" charset="0"/>
-                          <a:ea typeface="+mn-ea"/>
-                          <a:cs typeface="Calibri" panose="020F0502020204030204" pitchFamily="34" charset="0"/>
-                        </a:rPr>
-                        <a:t>Desarrollo y crecimiento</a:t>
-                      </a:r>
+                      <a:endParaRPr lang="es-MX" sz="1400" b="1" i="0" u="none" strike="noStrike" kern="1200">
+                        <a:solidFill>
+                          <a:schemeClr val="bg1">
+                            <a:lumMod val="65000"/>
+                          </a:schemeClr>
+                        </a:solidFill>
+                        <a:effectLst/>
+                        <a:latin typeface="Montserrat" panose="00000500000000000000" pitchFamily="2" charset="0"/>
+                        <a:ea typeface="+mn-ea"/>
+                        <a:cs typeface="Calibri" panose="020F0502020204030204" pitchFamily="34" charset="0"/>
+                      </a:endParaRPr>
                     </a:p>
                   </a:txBody>
                   <a:tcPr marL="7620" marR="7620" marT="7620" marB="0" anchor="ctr">
@@ -45953,16 +45550,13 @@
                       <a:pPr algn="l" fontAlgn="b">
                         <a:buNone/>
                       </a:pPr>
-                      <a:r>
-                        <a:rPr lang="es-MX" sz="1400" b="0" i="0" u="none" strike="noStrike" dirty="0">
-                          <a:solidFill>
-                            <a:srgbClr val="00B050"/>
-                          </a:solidFill>
-                          <a:effectLst/>
-                          <a:latin typeface="Montserrat" panose="00000500000000000000" pitchFamily="2" charset="0"/>
-                        </a:rPr>
-                        <a:t>La empresa reconoce mi esfuerzo</a:t>
-                      </a:r>
+                      <a:endParaRPr lang="es-MX" sz="1400" b="0" i="0" u="none" strike="noStrike" dirty="0">
+                        <a:solidFill>
+                          <a:srgbClr val="00B050"/>
+                        </a:solidFill>
+                        <a:effectLst/>
+                        <a:latin typeface="Montserrat" panose="00000500000000000000" pitchFamily="2" charset="0"/>
+                      </a:endParaRPr>
                     </a:p>
                   </a:txBody>
                   <a:tcPr marL="7620" marR="7620" marT="7620" marB="0" anchor="ctr">
@@ -46020,16 +45614,13 @@
                       <a:pPr algn="ctr" fontAlgn="b">
                         <a:buNone/>
                       </a:pPr>
-                      <a:r>
-                        <a:rPr lang="es-MX" sz="1400" b="1" i="0" u="none" strike="noStrike" dirty="0">
-                          <a:solidFill>
-                            <a:srgbClr val="00B050"/>
-                          </a:solidFill>
-                          <a:effectLst/>
-                          <a:latin typeface="Montserrat" panose="00000500000000000000" pitchFamily="2" charset="0"/>
-                        </a:rPr>
-                        <a:t>1</a:t>
-                      </a:r>
+                      <a:endParaRPr lang="es-MX" sz="1400" b="1" i="0" u="none" strike="noStrike" dirty="0">
+                        <a:solidFill>
+                          <a:srgbClr val="00B050"/>
+                        </a:solidFill>
+                        <a:effectLst/>
+                        <a:latin typeface="Montserrat" panose="00000500000000000000" pitchFamily="2" charset="0"/>
+                      </a:endParaRPr>
                     </a:p>
                   </a:txBody>
                   <a:tcPr marL="7620" marR="7620" marT="7620" marB="0" anchor="ctr">
@@ -46088,20 +45679,17 @@
                       <a:pPr marL="0" algn="ctr" defTabSz="609555" rtl="0" eaLnBrk="1" fontAlgn="b" latinLnBrk="0" hangingPunct="1">
                         <a:buNone/>
                       </a:pPr>
-                      <a:r>
-                        <a:rPr lang="es-MX" sz="1400" b="1" i="0" u="none" strike="noStrike" kern="1200">
-                          <a:solidFill>
-                            <a:schemeClr val="bg1">
-                              <a:lumMod val="65000"/>
-                            </a:schemeClr>
-                          </a:solidFill>
-                          <a:effectLst/>
-                          <a:latin typeface="Montserrat" panose="00000500000000000000" pitchFamily="2" charset="0"/>
-                          <a:ea typeface="+mn-ea"/>
-                          <a:cs typeface="Calibri" panose="020F0502020204030204" pitchFamily="34" charset="0"/>
-                        </a:rPr>
-                        <a:t>Desarrollo y crecimiento</a:t>
-                      </a:r>
+                      <a:endParaRPr lang="es-MX" sz="1400" b="1" i="0" u="none" strike="noStrike" kern="1200">
+                        <a:solidFill>
+                          <a:schemeClr val="bg1">
+                            <a:lumMod val="65000"/>
+                          </a:schemeClr>
+                        </a:solidFill>
+                        <a:effectLst/>
+                        <a:latin typeface="Montserrat" panose="00000500000000000000" pitchFamily="2" charset="0"/>
+                        <a:ea typeface="+mn-ea"/>
+                        <a:cs typeface="Calibri" panose="020F0502020204030204" pitchFamily="34" charset="0"/>
+                      </a:endParaRPr>
                     </a:p>
                   </a:txBody>
                   <a:tcPr marL="7620" marR="7620" marT="7620" marB="0" anchor="ctr">
@@ -46167,16 +45755,13 @@
                       <a:pPr algn="l" fontAlgn="b">
                         <a:buNone/>
                       </a:pPr>
-                      <a:r>
-                        <a:rPr lang="es-MX" sz="1400" b="0" i="0" u="none" strike="noStrike" dirty="0">
-                          <a:solidFill>
-                            <a:srgbClr val="00B050"/>
-                          </a:solidFill>
-                          <a:effectLst/>
-                          <a:latin typeface="Montserrat" panose="00000500000000000000" pitchFamily="2" charset="0"/>
-                        </a:rPr>
-                        <a:t>La empresa tiene buenas prestaciones y beneficios</a:t>
-                      </a:r>
+                      <a:endParaRPr lang="es-MX" sz="1400" b="0" i="0" u="none" strike="noStrike" dirty="0">
+                        <a:solidFill>
+                          <a:srgbClr val="00B050"/>
+                        </a:solidFill>
+                        <a:effectLst/>
+                        <a:latin typeface="Montserrat" panose="00000500000000000000" pitchFamily="2" charset="0"/>
+                      </a:endParaRPr>
                     </a:p>
                   </a:txBody>
                   <a:tcPr marL="7620" marR="7620" marT="7620" marB="0" anchor="ctr">
@@ -46234,16 +45819,13 @@
                       <a:pPr algn="ctr" fontAlgn="b">
                         <a:buNone/>
                       </a:pPr>
-                      <a:r>
-                        <a:rPr lang="es-MX" sz="1400" b="1" i="0" u="none" strike="noStrike" dirty="0">
-                          <a:solidFill>
-                            <a:srgbClr val="00B050"/>
-                          </a:solidFill>
-                          <a:effectLst/>
-                          <a:latin typeface="Montserrat" panose="00000500000000000000" pitchFamily="2" charset="0"/>
-                        </a:rPr>
-                        <a:t>1</a:t>
-                      </a:r>
+                      <a:endParaRPr lang="es-MX" sz="1400" b="1" i="0" u="none" strike="noStrike" dirty="0">
+                        <a:solidFill>
+                          <a:srgbClr val="00B050"/>
+                        </a:solidFill>
+                        <a:effectLst/>
+                        <a:latin typeface="Montserrat" panose="00000500000000000000" pitchFamily="2" charset="0"/>
+                      </a:endParaRPr>
                     </a:p>
                   </a:txBody>
                   <a:tcPr marL="7620" marR="7620" marT="7620" marB="0" anchor="ctr">
@@ -46302,20 +45884,17 @@
                       <a:pPr marL="0" algn="ctr" defTabSz="609555" rtl="0" eaLnBrk="1" fontAlgn="b" latinLnBrk="0" hangingPunct="1">
                         <a:buNone/>
                       </a:pPr>
-                      <a:r>
-                        <a:rPr lang="es-MX" sz="1400" b="1" i="0" u="none" strike="noStrike" kern="1200" dirty="0">
-                          <a:solidFill>
-                            <a:schemeClr val="bg1">
-                              <a:lumMod val="65000"/>
-                            </a:schemeClr>
-                          </a:solidFill>
-                          <a:effectLst/>
-                          <a:latin typeface="Montserrat" panose="00000500000000000000" pitchFamily="2" charset="0"/>
-                          <a:ea typeface="+mn-ea"/>
-                          <a:cs typeface="Calibri" panose="020F0502020204030204" pitchFamily="34" charset="0"/>
-                        </a:rPr>
-                        <a:t>Compensación</a:t>
-                      </a:r>
+                      <a:endParaRPr lang="es-MX" sz="1400" b="1" i="0" u="none" strike="noStrike" kern="1200" dirty="0">
+                        <a:solidFill>
+                          <a:schemeClr val="bg1">
+                            <a:lumMod val="65000"/>
+                          </a:schemeClr>
+                        </a:solidFill>
+                        <a:effectLst/>
+                        <a:latin typeface="Montserrat" panose="00000500000000000000" pitchFamily="2" charset="0"/>
+                        <a:ea typeface="+mn-ea"/>
+                        <a:cs typeface="Calibri" panose="020F0502020204030204" pitchFamily="34" charset="0"/>
+                      </a:endParaRPr>
                     </a:p>
                   </a:txBody>
                   <a:tcPr marL="7620" marR="7620" marT="7620" marB="0" anchor="ctr">
@@ -46381,16 +45960,13 @@
                       <a:pPr algn="l" fontAlgn="b">
                         <a:buNone/>
                       </a:pPr>
-                      <a:r>
-                        <a:rPr lang="es-MX" sz="1400" b="0" i="0" u="none" strike="noStrike" dirty="0">
-                          <a:solidFill>
-                            <a:srgbClr val="00B050"/>
-                          </a:solidFill>
-                          <a:effectLst/>
-                          <a:latin typeface="Montserrat" panose="00000500000000000000" pitchFamily="2" charset="0"/>
-                        </a:rPr>
-                        <a:t>Me gusta mi trabajo</a:t>
-                      </a:r>
+                      <a:endParaRPr lang="es-MX" sz="1400" b="0" i="0" u="none" strike="noStrike" dirty="0">
+                        <a:solidFill>
+                          <a:srgbClr val="00B050"/>
+                        </a:solidFill>
+                        <a:effectLst/>
+                        <a:latin typeface="Montserrat" panose="00000500000000000000" pitchFamily="2" charset="0"/>
+                      </a:endParaRPr>
                     </a:p>
                   </a:txBody>
                   <a:tcPr marL="7620" marR="7620" marT="7620" marB="0" anchor="ctr">
@@ -46448,16 +46024,13 @@
                       <a:pPr algn="ctr" fontAlgn="b">
                         <a:buNone/>
                       </a:pPr>
-                      <a:r>
-                        <a:rPr lang="es-MX" sz="1400" b="1" i="0" u="none" strike="noStrike" dirty="0">
-                          <a:solidFill>
-                            <a:srgbClr val="00B050"/>
-                          </a:solidFill>
-                          <a:effectLst/>
-                          <a:latin typeface="Montserrat" panose="00000500000000000000" pitchFamily="2" charset="0"/>
-                        </a:rPr>
-                        <a:t>1</a:t>
-                      </a:r>
+                      <a:endParaRPr lang="es-MX" sz="1400" b="1" i="0" u="none" strike="noStrike" dirty="0">
+                        <a:solidFill>
+                          <a:srgbClr val="00B050"/>
+                        </a:solidFill>
+                        <a:effectLst/>
+                        <a:latin typeface="Montserrat" panose="00000500000000000000" pitchFamily="2" charset="0"/>
+                      </a:endParaRPr>
                     </a:p>
                   </a:txBody>
                   <a:tcPr marL="7620" marR="7620" marT="7620" marB="0" anchor="ctr">
@@ -46516,20 +46089,17 @@
                       <a:pPr marL="0" algn="ctr" defTabSz="609555" rtl="0" eaLnBrk="1" fontAlgn="b" latinLnBrk="0" hangingPunct="1">
                         <a:buNone/>
                       </a:pPr>
-                      <a:r>
-                        <a:rPr lang="es-MX" sz="1400" b="1" i="0" u="none" strike="noStrike" kern="1200">
-                          <a:solidFill>
-                            <a:schemeClr val="bg1">
-                              <a:lumMod val="65000"/>
-                            </a:schemeClr>
-                          </a:solidFill>
-                          <a:effectLst/>
-                          <a:latin typeface="Montserrat" panose="00000500000000000000" pitchFamily="2" charset="0"/>
-                          <a:ea typeface="+mn-ea"/>
-                          <a:cs typeface="Calibri" panose="020F0502020204030204" pitchFamily="34" charset="0"/>
-                        </a:rPr>
-                        <a:t>Ambiente laboral</a:t>
-                      </a:r>
+                      <a:endParaRPr lang="es-MX" sz="1400" b="1" i="0" u="none" strike="noStrike" kern="1200">
+                        <a:solidFill>
+                          <a:schemeClr val="bg1">
+                            <a:lumMod val="65000"/>
+                          </a:schemeClr>
+                        </a:solidFill>
+                        <a:effectLst/>
+                        <a:latin typeface="Montserrat" panose="00000500000000000000" pitchFamily="2" charset="0"/>
+                        <a:ea typeface="+mn-ea"/>
+                        <a:cs typeface="Calibri" panose="020F0502020204030204" pitchFamily="34" charset="0"/>
+                      </a:endParaRPr>
                     </a:p>
                   </a:txBody>
                   <a:tcPr marL="7620" marR="7620" marT="7620" marB="0" anchor="ctr">
@@ -46595,16 +46165,13 @@
                       <a:pPr algn="l" fontAlgn="b">
                         <a:buNone/>
                       </a:pPr>
-                      <a:r>
-                        <a:rPr lang="es-MX" sz="1400" b="0" i="0" u="none" strike="noStrike" dirty="0">
-                          <a:solidFill>
-                            <a:srgbClr val="00B050"/>
-                          </a:solidFill>
-                          <a:effectLst/>
-                          <a:latin typeface="Montserrat" panose="00000500000000000000" pitchFamily="2" charset="0"/>
-                        </a:rPr>
-                        <a:t>Toman en cuenta mis opiniones</a:t>
-                      </a:r>
+                      <a:endParaRPr lang="es-MX" sz="1400" b="0" i="0" u="none" strike="noStrike" dirty="0">
+                        <a:solidFill>
+                          <a:srgbClr val="00B050"/>
+                        </a:solidFill>
+                        <a:effectLst/>
+                        <a:latin typeface="Montserrat" panose="00000500000000000000" pitchFamily="2" charset="0"/>
+                      </a:endParaRPr>
                     </a:p>
                   </a:txBody>
                   <a:tcPr marL="7620" marR="7620" marT="7620" marB="0" anchor="ctr">
@@ -46662,16 +46229,13 @@
                       <a:pPr algn="ctr" fontAlgn="b">
                         <a:buNone/>
                       </a:pPr>
-                      <a:r>
-                        <a:rPr lang="es-MX" sz="1400" b="1" i="0" u="none" strike="noStrike" dirty="0">
-                          <a:solidFill>
-                            <a:srgbClr val="00B050"/>
-                          </a:solidFill>
-                          <a:effectLst/>
-                          <a:latin typeface="Montserrat" panose="00000500000000000000" pitchFamily="2" charset="0"/>
-                        </a:rPr>
-                        <a:t>1</a:t>
-                      </a:r>
+                      <a:endParaRPr lang="es-MX" sz="1400" b="1" i="0" u="none" strike="noStrike" dirty="0">
+                        <a:solidFill>
+                          <a:srgbClr val="00B050"/>
+                        </a:solidFill>
+                        <a:effectLst/>
+                        <a:latin typeface="Montserrat" panose="00000500000000000000" pitchFamily="2" charset="0"/>
+                      </a:endParaRPr>
                     </a:p>
                   </a:txBody>
                   <a:tcPr marL="7620" marR="7620" marT="7620" marB="0" anchor="ctr">
@@ -46730,20 +46294,17 @@
                       <a:pPr marL="0" algn="ctr" defTabSz="609555" rtl="0" eaLnBrk="1" fontAlgn="b" latinLnBrk="0" hangingPunct="1">
                         <a:buNone/>
                       </a:pPr>
-                      <a:r>
-                        <a:rPr lang="es-MX" sz="1400" b="1" i="0" u="none" strike="noStrike" kern="1200" dirty="0">
-                          <a:solidFill>
-                            <a:schemeClr val="bg1">
-                              <a:lumMod val="65000"/>
-                            </a:schemeClr>
-                          </a:solidFill>
-                          <a:effectLst/>
-                          <a:latin typeface="Montserrat" panose="00000500000000000000" pitchFamily="2" charset="0"/>
-                          <a:ea typeface="+mn-ea"/>
-                          <a:cs typeface="Calibri" panose="020F0502020204030204" pitchFamily="34" charset="0"/>
-                        </a:rPr>
-                        <a:t>Comunicación</a:t>
-                      </a:r>
+                      <a:endParaRPr lang="es-MX" sz="1400" b="1" i="0" u="none" strike="noStrike" kern="1200" dirty="0">
+                        <a:solidFill>
+                          <a:schemeClr val="bg1">
+                            <a:lumMod val="65000"/>
+                          </a:schemeClr>
+                        </a:solidFill>
+                        <a:effectLst/>
+                        <a:latin typeface="Montserrat" panose="00000500000000000000" pitchFamily="2" charset="0"/>
+                        <a:ea typeface="+mn-ea"/>
+                        <a:cs typeface="Calibri" panose="020F0502020204030204" pitchFamily="34" charset="0"/>
+                      </a:endParaRPr>
                     </a:p>
                   </a:txBody>
                   <a:tcPr marL="7620" marR="7620" marT="7620" marB="0" anchor="ctr">
